--- a/docs/عرض-تحليل-المنافذ-وخطة-المبيعات.pptx
+++ b/docs/عرض-تحليل-المنافذ-وخطة-المبيعات.pptx
@@ -22812,7 +22812,7 @@
                 <a:ea typeface="DIN Next Arabic" pitchFamily="34" charset="-122"/>
                 <a:cs typeface="DIN Next Arabic" pitchFamily="34" charset="-120"/>
               </a:rPr>
-              <a:t>الوردية تأخذ حصتها من منحنى الطلب الفعلي، والعامل يأخذ حصته من الوردية</a:t>
+              <a:t>ثلاث طبقات — والوحدة «معاملة» في الطبقتين الأوليين، والريال في الثالثة فقط</a:t>
             </a:r>
             <a:endParaRPr lang="en-US" sz="1200" dirty="0"/>
           </a:p>
@@ -22918,18 +22918,57 @@
       </p:sp>
       <p:sp>
         <p:nvSpPr>
-          <p:cNvPr id="8" name="Shape 6"/>
-          <p:cNvSpPr/>
-          <p:nvPr/>
-        </p:nvSpPr>
-        <p:spPr>
-          <a:xfrm>
-            <a:off x="566928" y="1371600"/>
-            <a:ext cx="11027664" cy="658368"/>
+          <p:cNvPr id="8" name="Text 6"/>
+          <p:cNvSpPr/>
+          <p:nvPr/>
+        </p:nvSpPr>
+        <p:spPr>
+          <a:xfrm>
+            <a:off x="566928" y="1335024"/>
+            <a:ext cx="11027664" cy="274320"/>
+          </a:xfrm>
+          <a:prstGeom prst="rect">
+            <a:avLst/>
+          </a:prstGeom>
+          <a:noFill/>
+          <a:ln/>
+        </p:spPr>
+        <p:txBody>
+          <a:bodyPr wrap="square" rtlCol="0" anchor="ctr"/>
+          <a:lstStyle/>
+          <a:p>
+            <a:pPr rtl="1" algn="r" indent="0" marL="0">
+              <a:buNone/>
+            </a:pPr>
+            <a:r>
+              <a:rPr lang="en-US" sz="1350" b="1" dirty="0">
+                <a:solidFill>
+                  <a:srgbClr val="F5831F"/>
+                </a:solidFill>
+                <a:latin typeface="DIN Next Arabic" pitchFamily="34" charset="0"/>
+                <a:ea typeface="DIN Next Arabic" pitchFamily="34" charset="-122"/>
+                <a:cs typeface="DIN Next Arabic" pitchFamily="34" charset="-120"/>
+              </a:rPr>
+              <a:t>① كيف يُشتقّ الرقم — العمرة الجديدة MK007</a:t>
+            </a:r>
+            <a:endParaRPr lang="en-US" sz="1350" dirty="0"/>
+          </a:p>
+        </p:txBody>
+      </p:sp>
+      <p:sp>
+        <p:nvSpPr>
+          <p:cNvPr id="9" name="Shape 7"/>
+          <p:cNvSpPr/>
+          <p:nvPr/>
+        </p:nvSpPr>
+        <p:spPr>
+          <a:xfrm>
+            <a:off x="9198864" y="1993392"/>
+            <a:ext cx="2395728" cy="749808"/>
           </a:xfrm>
           <a:prstGeom prst="roundRect">
             <a:avLst>
-              <a:gd name="adj" fmla="val 5556"/>
+              <a:gd name="adj" fmla="val 6098"/>
             </a:avLst>
           </a:prstGeom>
           <a:solidFill>
@@ -22940,14 +22979,14 @@
       </p:sp>
       <p:sp>
         <p:nvSpPr>
-          <p:cNvPr id="9" name="Text 7"/>
-          <p:cNvSpPr/>
-          <p:nvPr/>
-        </p:nvSpPr>
-        <p:spPr>
-          <a:xfrm>
-            <a:off x="749808" y="1481328"/>
-            <a:ext cx="10661904" cy="457200"/>
+          <p:cNvPr id="10" name="Text 8"/>
+          <p:cNvSpPr/>
+          <p:nvPr/>
+        </p:nvSpPr>
+        <p:spPr>
+          <a:xfrm>
+            <a:off x="9198864" y="2066544"/>
+            <a:ext cx="2395728" cy="402336"/>
           </a:xfrm>
           <a:prstGeom prst="rect">
             <a:avLst/>
@@ -22963,7 +23002,7 @@
               <a:buNone/>
             </a:pPr>
             <a:r>
-              <a:rPr lang="en-US" sz="1500" b="1" dirty="0">
+              <a:rPr lang="en-US" sz="2500" b="1" dirty="0">
                 <a:solidFill>
                   <a:srgbClr val="FFFFFF"/>
                 </a:solidFill>
@@ -22971,21 +23010,792 @@
                 <a:ea typeface="DIN Next Arabic" pitchFamily="34" charset="-122"/>
                 <a:cs typeface="DIN Next Arabic" pitchFamily="34" charset="-120"/>
               </a:rPr>
-              <a:t>مستهدف العامل  =  ( زيارات المحطة × حصة الوردية ) ÷ عمال الوردية      ×      مستهدف اللتر لكل زيارة</a:t>
-            </a:r>
-            <a:endParaRPr lang="en-US" sz="1500" dirty="0"/>
-          </a:p>
-        </p:txBody>
-      </p:sp>
-      <p:sp>
-        <p:nvSpPr>
-          <p:cNvPr id="10" name="Shape 8"/>
-          <p:cNvSpPr/>
-          <p:nvPr/>
-        </p:nvSpPr>
-        <p:spPr>
-          <a:xfrm>
-            <a:off x="566928" y="2331720"/>
+              <a:t>٤٬٢٦١</a:t>
+            </a:r>
+            <a:endParaRPr lang="en-US" sz="2500" dirty="0"/>
+          </a:p>
+        </p:txBody>
+      </p:sp>
+      <p:sp>
+        <p:nvSpPr>
+          <p:cNvPr id="11" name="Text 9"/>
+          <p:cNvSpPr/>
+          <p:nvPr/>
+        </p:nvSpPr>
+        <p:spPr>
+          <a:xfrm>
+            <a:off x="9198864" y="2459736"/>
+            <a:ext cx="2395728" cy="274320"/>
+          </a:xfrm>
+          <a:prstGeom prst="rect">
+            <a:avLst/>
+          </a:prstGeom>
+          <a:noFill/>
+          <a:ln/>
+        </p:spPr>
+        <p:txBody>
+          <a:bodyPr wrap="square" lIns="0" tIns="0" rIns="0" bIns="0" rtlCol="0" anchor="ctr"/>
+          <a:lstStyle/>
+          <a:p>
+            <a:pPr algn="ctr" indent="0" marL="0">
+              <a:buNone/>
+            </a:pPr>
+            <a:r>
+              <a:rPr lang="en-US" sz="1050" dirty="0">
+                <a:solidFill>
+                  <a:srgbClr val="D6D2CC"/>
+                </a:solidFill>
+                <a:latin typeface="DIN Next Arabic" pitchFamily="34" charset="0"/>
+                <a:ea typeface="DIN Next Arabic" pitchFamily="34" charset="-122"/>
+                <a:cs typeface="DIN Next Arabic" pitchFamily="34" charset="-120"/>
+              </a:rPr>
+              <a:t>معاملة يومياً — كل المحطة</a:t>
+            </a:r>
+            <a:endParaRPr lang="en-US" sz="1050" dirty="0"/>
+          </a:p>
+        </p:txBody>
+      </p:sp>
+      <p:sp>
+        <p:nvSpPr>
+          <p:cNvPr id="12" name="Text 10"/>
+          <p:cNvSpPr/>
+          <p:nvPr/>
+        </p:nvSpPr>
+        <p:spPr>
+          <a:xfrm>
+            <a:off x="8887968" y="2002536"/>
+            <a:ext cx="310896" cy="749808"/>
+          </a:xfrm>
+          <a:prstGeom prst="rect">
+            <a:avLst/>
+          </a:prstGeom>
+          <a:noFill/>
+          <a:ln/>
+        </p:spPr>
+        <p:txBody>
+          <a:bodyPr wrap="square" lIns="0" tIns="0" rIns="0" bIns="0" rtlCol="0" anchor="ctr"/>
+          <a:lstStyle/>
+          <a:p>
+            <a:pPr algn="ctr" indent="0" marL="0">
+              <a:buNone/>
+            </a:pPr>
+            <a:r>
+              <a:rPr lang="en-US" sz="1300" dirty="0">
+                <a:solidFill>
+                  <a:srgbClr val="9B968E"/>
+                </a:solidFill>
+                <a:latin typeface="DIN Next Arabic" pitchFamily="34" charset="0"/>
+                <a:ea typeface="DIN Next Arabic" pitchFamily="34" charset="-122"/>
+                <a:cs typeface="DIN Next Arabic" pitchFamily="34" charset="-120"/>
+              </a:rPr>
+              <a:t>◀</a:t>
+            </a:r>
+            <a:endParaRPr lang="en-US" sz="1300" dirty="0"/>
+          </a:p>
+        </p:txBody>
+      </p:sp>
+      <p:sp>
+        <p:nvSpPr>
+          <p:cNvPr id="13" name="Shape 11"/>
+          <p:cNvSpPr/>
+          <p:nvPr/>
+        </p:nvSpPr>
+        <p:spPr>
+          <a:xfrm>
+            <a:off x="6492240" y="1609344"/>
+            <a:ext cx="2395728" cy="749808"/>
+          </a:xfrm>
+          <a:prstGeom prst="roundRect">
+            <a:avLst>
+              <a:gd name="adj" fmla="val 6098"/>
+            </a:avLst>
+          </a:prstGeom>
+          <a:solidFill>
+            <a:srgbClr val="F5F2ED"/>
+          </a:solidFill>
+          <a:ln w="15240">
+            <a:solidFill>
+              <a:srgbClr val="55565A"/>
+            </a:solidFill>
+            <a:prstDash val="solid"/>
+          </a:ln>
+        </p:spPr>
+      </p:sp>
+      <p:sp>
+        <p:nvSpPr>
+          <p:cNvPr id="14" name="Text 12"/>
+          <p:cNvSpPr/>
+          <p:nvPr/>
+        </p:nvSpPr>
+        <p:spPr>
+          <a:xfrm>
+            <a:off x="6565392" y="1664208"/>
+            <a:ext cx="2249424" cy="237744"/>
+          </a:xfrm>
+          <a:prstGeom prst="rect">
+            <a:avLst/>
+          </a:prstGeom>
+          <a:noFill/>
+          <a:ln/>
+        </p:spPr>
+        <p:txBody>
+          <a:bodyPr wrap="square" lIns="0" tIns="0" rIns="0" bIns="0" rtlCol="0" anchor="ctr"/>
+          <a:lstStyle/>
+          <a:p>
+            <a:pPr algn="ctr" indent="0" marL="0">
+              <a:buNone/>
+            </a:pPr>
+            <a:r>
+              <a:rPr lang="en-US" sz="1000" dirty="0">
+                <a:solidFill>
+                  <a:srgbClr val="6E6A64"/>
+                </a:solidFill>
+                <a:latin typeface="DIN Next Arabic" pitchFamily="34" charset="0"/>
+                <a:ea typeface="DIN Next Arabic" pitchFamily="34" charset="-122"/>
+                <a:cs typeface="DIN Next Arabic" pitchFamily="34" charset="-120"/>
+              </a:rPr>
+              <a:t>الصباح ٦ص – ٦م</a:t>
+            </a:r>
+            <a:endParaRPr lang="en-US" sz="1000" dirty="0"/>
+          </a:p>
+        </p:txBody>
+      </p:sp>
+      <p:sp>
+        <p:nvSpPr>
+          <p:cNvPr id="15" name="Text 13"/>
+          <p:cNvSpPr/>
+          <p:nvPr/>
+        </p:nvSpPr>
+        <p:spPr>
+          <a:xfrm>
+            <a:off x="6565392" y="1865376"/>
+            <a:ext cx="2249424" cy="329184"/>
+          </a:xfrm>
+          <a:prstGeom prst="rect">
+            <a:avLst/>
+          </a:prstGeom>
+          <a:noFill/>
+          <a:ln/>
+        </p:spPr>
+        <p:txBody>
+          <a:bodyPr wrap="square" lIns="0" tIns="0" rIns="0" bIns="0" rtlCol="0" anchor="ctr"/>
+          <a:lstStyle/>
+          <a:p>
+            <a:pPr algn="ctr" indent="0" marL="0">
+              <a:buNone/>
+            </a:pPr>
+            <a:r>
+              <a:rPr lang="en-US" sz="1150" b="1" dirty="0">
+                <a:solidFill>
+                  <a:srgbClr val="55565A"/>
+                </a:solidFill>
+                <a:latin typeface="DIN Next Arabic" pitchFamily="34" charset="0"/>
+                <a:ea typeface="DIN Next Arabic" pitchFamily="34" charset="-122"/>
+                <a:cs typeface="DIN Next Arabic" pitchFamily="34" charset="-120"/>
+              </a:rPr>
+              <a:t>٢٬٠٨٧ معاملة ÷ ١١ عاملاً</a:t>
+            </a:r>
+            <a:endParaRPr lang="en-US" sz="1150" dirty="0"/>
+          </a:p>
+        </p:txBody>
+      </p:sp>
+      <p:sp>
+        <p:nvSpPr>
+          <p:cNvPr id="16" name="Text 14"/>
+          <p:cNvSpPr/>
+          <p:nvPr/>
+        </p:nvSpPr>
+        <p:spPr>
+          <a:xfrm>
+            <a:off x="6565392" y="2176272"/>
+            <a:ext cx="2249424" cy="237744"/>
+          </a:xfrm>
+          <a:prstGeom prst="rect">
+            <a:avLst/>
+          </a:prstGeom>
+          <a:noFill/>
+          <a:ln/>
+        </p:spPr>
+        <p:txBody>
+          <a:bodyPr wrap="square" lIns="0" tIns="0" rIns="0" bIns="0" rtlCol="0" anchor="ctr"/>
+          <a:lstStyle/>
+          <a:p>
+            <a:pPr algn="ctr" indent="0" marL="0">
+              <a:buNone/>
+            </a:pPr>
+            <a:r>
+              <a:rPr lang="en-US" sz="1250" b="1" dirty="0">
+                <a:solidFill>
+                  <a:srgbClr val="55565A"/>
+                </a:solidFill>
+                <a:latin typeface="DIN Next Arabic" pitchFamily="34" charset="0"/>
+                <a:ea typeface="DIN Next Arabic" pitchFamily="34" charset="-122"/>
+                <a:cs typeface="DIN Next Arabic" pitchFamily="34" charset="-120"/>
+              </a:rPr>
+              <a:t>= ١٩٠ معاملة للعامل</a:t>
+            </a:r>
+            <a:endParaRPr lang="en-US" sz="1250" dirty="0"/>
+          </a:p>
+        </p:txBody>
+      </p:sp>
+      <p:sp>
+        <p:nvSpPr>
+          <p:cNvPr id="17" name="Shape 15"/>
+          <p:cNvSpPr/>
+          <p:nvPr/>
+        </p:nvSpPr>
+        <p:spPr>
+          <a:xfrm>
+            <a:off x="6492240" y="2432304"/>
+            <a:ext cx="2395728" cy="749808"/>
+          </a:xfrm>
+          <a:prstGeom prst="roundRect">
+            <a:avLst>
+              <a:gd name="adj" fmla="val 6098"/>
+            </a:avLst>
+          </a:prstGeom>
+          <a:solidFill>
+            <a:srgbClr val="FBEEE0"/>
+          </a:solidFill>
+          <a:ln w="15240">
+            <a:solidFill>
+              <a:srgbClr val="F5831F"/>
+            </a:solidFill>
+            <a:prstDash val="solid"/>
+          </a:ln>
+        </p:spPr>
+      </p:sp>
+      <p:sp>
+        <p:nvSpPr>
+          <p:cNvPr id="18" name="Text 16"/>
+          <p:cNvSpPr/>
+          <p:nvPr/>
+        </p:nvSpPr>
+        <p:spPr>
+          <a:xfrm>
+            <a:off x="6565392" y="2487168"/>
+            <a:ext cx="2249424" cy="237744"/>
+          </a:xfrm>
+          <a:prstGeom prst="rect">
+            <a:avLst/>
+          </a:prstGeom>
+          <a:noFill/>
+          <a:ln/>
+        </p:spPr>
+        <p:txBody>
+          <a:bodyPr wrap="square" lIns="0" tIns="0" rIns="0" bIns="0" rtlCol="0" anchor="ctr"/>
+          <a:lstStyle/>
+          <a:p>
+            <a:pPr algn="ctr" indent="0" marL="0">
+              <a:buNone/>
+            </a:pPr>
+            <a:r>
+              <a:rPr lang="en-US" sz="1000" dirty="0">
+                <a:solidFill>
+                  <a:srgbClr val="6E6A64"/>
+                </a:solidFill>
+                <a:latin typeface="DIN Next Arabic" pitchFamily="34" charset="0"/>
+                <a:ea typeface="DIN Next Arabic" pitchFamily="34" charset="-122"/>
+                <a:cs typeface="DIN Next Arabic" pitchFamily="34" charset="-120"/>
+              </a:rPr>
+              <a:t>المساء ٦م – ٦ص</a:t>
+            </a:r>
+            <a:endParaRPr lang="en-US" sz="1000" dirty="0"/>
+          </a:p>
+        </p:txBody>
+      </p:sp>
+      <p:sp>
+        <p:nvSpPr>
+          <p:cNvPr id="19" name="Text 17"/>
+          <p:cNvSpPr/>
+          <p:nvPr/>
+        </p:nvSpPr>
+        <p:spPr>
+          <a:xfrm>
+            <a:off x="6565392" y="2688336"/>
+            <a:ext cx="2249424" cy="329184"/>
+          </a:xfrm>
+          <a:prstGeom prst="rect">
+            <a:avLst/>
+          </a:prstGeom>
+          <a:noFill/>
+          <a:ln/>
+        </p:spPr>
+        <p:txBody>
+          <a:bodyPr wrap="square" lIns="0" tIns="0" rIns="0" bIns="0" rtlCol="0" anchor="ctr"/>
+          <a:lstStyle/>
+          <a:p>
+            <a:pPr algn="ctr" indent="0" marL="0">
+              <a:buNone/>
+            </a:pPr>
+            <a:r>
+              <a:rPr lang="en-US" sz="1150" b="1" dirty="0">
+                <a:solidFill>
+                  <a:srgbClr val="55565A"/>
+                </a:solidFill>
+                <a:latin typeface="DIN Next Arabic" pitchFamily="34" charset="0"/>
+                <a:ea typeface="DIN Next Arabic" pitchFamily="34" charset="-122"/>
+                <a:cs typeface="DIN Next Arabic" pitchFamily="34" charset="-120"/>
+              </a:rPr>
+              <a:t>٢٬١٧٤ معاملة ÷ ٩ عمال</a:t>
+            </a:r>
+            <a:endParaRPr lang="en-US" sz="1150" dirty="0"/>
+          </a:p>
+        </p:txBody>
+      </p:sp>
+      <p:sp>
+        <p:nvSpPr>
+          <p:cNvPr id="20" name="Text 18"/>
+          <p:cNvSpPr/>
+          <p:nvPr/>
+        </p:nvSpPr>
+        <p:spPr>
+          <a:xfrm>
+            <a:off x="6565392" y="2999232"/>
+            <a:ext cx="2249424" cy="237744"/>
+          </a:xfrm>
+          <a:prstGeom prst="rect">
+            <a:avLst/>
+          </a:prstGeom>
+          <a:noFill/>
+          <a:ln/>
+        </p:spPr>
+        <p:txBody>
+          <a:bodyPr wrap="square" lIns="0" tIns="0" rIns="0" bIns="0" rtlCol="0" anchor="ctr"/>
+          <a:lstStyle/>
+          <a:p>
+            <a:pPr algn="ctr" indent="0" marL="0">
+              <a:buNone/>
+            </a:pPr>
+            <a:r>
+              <a:rPr lang="en-US" sz="1250" b="1" dirty="0">
+                <a:solidFill>
+                  <a:srgbClr val="F5831F"/>
+                </a:solidFill>
+                <a:latin typeface="DIN Next Arabic" pitchFamily="34" charset="0"/>
+                <a:ea typeface="DIN Next Arabic" pitchFamily="34" charset="-122"/>
+                <a:cs typeface="DIN Next Arabic" pitchFamily="34" charset="-120"/>
+              </a:rPr>
+              <a:t>= ٢٤٢ معاملة للعامل</a:t>
+            </a:r>
+            <a:endParaRPr lang="en-US" sz="1250" dirty="0"/>
+          </a:p>
+        </p:txBody>
+      </p:sp>
+      <p:sp>
+        <p:nvSpPr>
+          <p:cNvPr id="21" name="Text 19"/>
+          <p:cNvSpPr/>
+          <p:nvPr/>
+        </p:nvSpPr>
+        <p:spPr>
+          <a:xfrm>
+            <a:off x="6181344" y="2002536"/>
+            <a:ext cx="310896" cy="749808"/>
+          </a:xfrm>
+          <a:prstGeom prst="rect">
+            <a:avLst/>
+          </a:prstGeom>
+          <a:noFill/>
+          <a:ln/>
+        </p:spPr>
+        <p:txBody>
+          <a:bodyPr wrap="square" lIns="0" tIns="0" rIns="0" bIns="0" rtlCol="0" anchor="ctr"/>
+          <a:lstStyle/>
+          <a:p>
+            <a:pPr algn="ctr" indent="0" marL="0">
+              <a:buNone/>
+            </a:pPr>
+            <a:r>
+              <a:rPr lang="en-US" sz="1300" dirty="0">
+                <a:solidFill>
+                  <a:srgbClr val="9B968E"/>
+                </a:solidFill>
+                <a:latin typeface="DIN Next Arabic" pitchFamily="34" charset="0"/>
+                <a:ea typeface="DIN Next Arabic" pitchFamily="34" charset="-122"/>
+                <a:cs typeface="DIN Next Arabic" pitchFamily="34" charset="-120"/>
+              </a:rPr>
+              <a:t>◀</a:t>
+            </a:r>
+            <a:endParaRPr lang="en-US" sz="1300" dirty="0"/>
+          </a:p>
+        </p:txBody>
+      </p:sp>
+      <p:sp>
+        <p:nvSpPr>
+          <p:cNvPr id="22" name="Shape 20"/>
+          <p:cNvSpPr/>
+          <p:nvPr/>
+        </p:nvSpPr>
+        <p:spPr>
+          <a:xfrm>
+            <a:off x="3785616" y="2002536"/>
+            <a:ext cx="2395728" cy="749808"/>
+          </a:xfrm>
+          <a:prstGeom prst="roundRect">
+            <a:avLst>
+              <a:gd name="adj" fmla="val 6098"/>
+            </a:avLst>
+          </a:prstGeom>
+          <a:solidFill>
+            <a:srgbClr val="F5F2ED"/>
+          </a:solidFill>
+          <a:ln w="15240">
+            <a:solidFill>
+              <a:srgbClr val="C0503A"/>
+            </a:solidFill>
+            <a:prstDash val="solid"/>
+          </a:ln>
+        </p:spPr>
+      </p:sp>
+      <p:sp>
+        <p:nvSpPr>
+          <p:cNvPr id="23" name="Text 21"/>
+          <p:cNvSpPr/>
+          <p:nvPr/>
+        </p:nvSpPr>
+        <p:spPr>
+          <a:xfrm>
+            <a:off x="3858768" y="2057400"/>
+            <a:ext cx="2249424" cy="237744"/>
+          </a:xfrm>
+          <a:prstGeom prst="rect">
+            <a:avLst/>
+          </a:prstGeom>
+          <a:noFill/>
+          <a:ln/>
+        </p:spPr>
+        <p:txBody>
+          <a:bodyPr wrap="square" lIns="0" tIns="0" rIns="0" bIns="0" rtlCol="0" anchor="ctr"/>
+          <a:lstStyle/>
+          <a:p>
+            <a:pPr algn="ctr" indent="0" marL="0">
+              <a:buNone/>
+            </a:pPr>
+            <a:r>
+              <a:rPr lang="en-US" sz="1000" dirty="0">
+                <a:solidFill>
+                  <a:srgbClr val="6E6A64"/>
+                </a:solidFill>
+                <a:latin typeface="DIN Next Arabic" pitchFamily="34" charset="0"/>
+                <a:ea typeface="DIN Next Arabic" pitchFamily="34" charset="-122"/>
+                <a:cs typeface="DIN Next Arabic" pitchFamily="34" charset="-120"/>
+              </a:rPr>
+              <a:t>الفارق بين الورديتين</a:t>
+            </a:r>
+            <a:endParaRPr lang="en-US" sz="1000" dirty="0"/>
+          </a:p>
+        </p:txBody>
+      </p:sp>
+      <p:sp>
+        <p:nvSpPr>
+          <p:cNvPr id="24" name="Text 22"/>
+          <p:cNvSpPr/>
+          <p:nvPr/>
+        </p:nvSpPr>
+        <p:spPr>
+          <a:xfrm>
+            <a:off x="3858768" y="2258568"/>
+            <a:ext cx="2249424" cy="329184"/>
+          </a:xfrm>
+          <a:prstGeom prst="rect">
+            <a:avLst/>
+          </a:prstGeom>
+          <a:noFill/>
+          <a:ln/>
+        </p:spPr>
+        <p:txBody>
+          <a:bodyPr wrap="square" lIns="0" tIns="0" rIns="0" bIns="0" rtlCol="0" anchor="ctr"/>
+          <a:lstStyle/>
+          <a:p>
+            <a:pPr algn="ctr" indent="0" marL="0">
+              <a:buNone/>
+            </a:pPr>
+            <a:r>
+              <a:rPr lang="en-US" sz="1150" b="1" dirty="0">
+                <a:solidFill>
+                  <a:srgbClr val="55565A"/>
+                </a:solidFill>
+                <a:latin typeface="DIN Next Arabic" pitchFamily="34" charset="0"/>
+                <a:ea typeface="DIN Next Arabic" pitchFamily="34" charset="-122"/>
+                <a:cs typeface="DIN Next Arabic" pitchFamily="34" charset="-120"/>
+              </a:rPr>
+              <a:t>المساء ٥١٪ من الطلب · ٤٥٪ من الطاقم</a:t>
+            </a:r>
+            <a:endParaRPr lang="en-US" sz="1150" dirty="0"/>
+          </a:p>
+        </p:txBody>
+      </p:sp>
+      <p:sp>
+        <p:nvSpPr>
+          <p:cNvPr id="25" name="Text 23"/>
+          <p:cNvSpPr/>
+          <p:nvPr/>
+        </p:nvSpPr>
+        <p:spPr>
+          <a:xfrm>
+            <a:off x="3858768" y="2569464"/>
+            <a:ext cx="2249424" cy="237744"/>
+          </a:xfrm>
+          <a:prstGeom prst="rect">
+            <a:avLst/>
+          </a:prstGeom>
+          <a:noFill/>
+          <a:ln/>
+        </p:spPr>
+        <p:txBody>
+          <a:bodyPr wrap="square" lIns="0" tIns="0" rIns="0" bIns="0" rtlCol="0" anchor="ctr"/>
+          <a:lstStyle/>
+          <a:p>
+            <a:pPr algn="ctr" indent="0" marL="0">
+              <a:buNone/>
+            </a:pPr>
+            <a:r>
+              <a:rPr lang="en-US" sz="1250" b="1" dirty="0">
+                <a:solidFill>
+                  <a:srgbClr val="C0503A"/>
+                </a:solidFill>
+                <a:latin typeface="DIN Next Arabic" pitchFamily="34" charset="0"/>
+                <a:ea typeface="DIN Next Arabic" pitchFamily="34" charset="-122"/>
+                <a:cs typeface="DIN Next Arabic" pitchFamily="34" charset="-120"/>
+              </a:rPr>
+              <a:t>المسائي يخدم +٢٧٪</a:t>
+            </a:r>
+            <a:endParaRPr lang="en-US" sz="1250" dirty="0"/>
+          </a:p>
+        </p:txBody>
+      </p:sp>
+      <p:sp>
+        <p:nvSpPr>
+          <p:cNvPr id="26" name="Text 24"/>
+          <p:cNvSpPr/>
+          <p:nvPr/>
+        </p:nvSpPr>
+        <p:spPr>
+          <a:xfrm>
+            <a:off x="3474720" y="2002536"/>
+            <a:ext cx="310896" cy="749808"/>
+          </a:xfrm>
+          <a:prstGeom prst="rect">
+            <a:avLst/>
+          </a:prstGeom>
+          <a:noFill/>
+          <a:ln/>
+        </p:spPr>
+        <p:txBody>
+          <a:bodyPr wrap="square" lIns="0" tIns="0" rIns="0" bIns="0" rtlCol="0" anchor="ctr"/>
+          <a:lstStyle/>
+          <a:p>
+            <a:pPr algn="ctr" indent="0" marL="0">
+              <a:buNone/>
+            </a:pPr>
+            <a:r>
+              <a:rPr lang="en-US" sz="1300" dirty="0">
+                <a:solidFill>
+                  <a:srgbClr val="9B968E"/>
+                </a:solidFill>
+                <a:latin typeface="DIN Next Arabic" pitchFamily="34" charset="0"/>
+                <a:ea typeface="DIN Next Arabic" pitchFamily="34" charset="-122"/>
+                <a:cs typeface="DIN Next Arabic" pitchFamily="34" charset="-120"/>
+              </a:rPr>
+              <a:t>◀</a:t>
+            </a:r>
+            <a:endParaRPr lang="en-US" sz="1300" dirty="0"/>
+          </a:p>
+        </p:txBody>
+      </p:sp>
+      <p:sp>
+        <p:nvSpPr>
+          <p:cNvPr id="27" name="Shape 25"/>
+          <p:cNvSpPr/>
+          <p:nvPr/>
+        </p:nvSpPr>
+        <p:spPr>
+          <a:xfrm>
+            <a:off x="1078992" y="2002536"/>
+            <a:ext cx="2395728" cy="749808"/>
+          </a:xfrm>
+          <a:prstGeom prst="roundRect">
+            <a:avLst>
+              <a:gd name="adj" fmla="val 6098"/>
+            </a:avLst>
+          </a:prstGeom>
+          <a:solidFill>
+            <a:srgbClr val="F5F2ED"/>
+          </a:solidFill>
+          <a:ln w="15240">
+            <a:solidFill>
+              <a:srgbClr val="2E8B6F"/>
+            </a:solidFill>
+            <a:prstDash val="solid"/>
+          </a:ln>
+        </p:spPr>
+      </p:sp>
+      <p:sp>
+        <p:nvSpPr>
+          <p:cNvPr id="28" name="Text 26"/>
+          <p:cNvSpPr/>
+          <p:nvPr/>
+        </p:nvSpPr>
+        <p:spPr>
+          <a:xfrm>
+            <a:off x="1152144" y="2057400"/>
+            <a:ext cx="2249424" cy="237744"/>
+          </a:xfrm>
+          <a:prstGeom prst="rect">
+            <a:avLst/>
+          </a:prstGeom>
+          <a:noFill/>
+          <a:ln/>
+        </p:spPr>
+        <p:txBody>
+          <a:bodyPr wrap="square" lIns="0" tIns="0" rIns="0" bIns="0" rtlCol="0" anchor="ctr"/>
+          <a:lstStyle/>
+          <a:p>
+            <a:pPr algn="ctr" indent="0" marL="0">
+              <a:buNone/>
+            </a:pPr>
+            <a:r>
+              <a:rPr lang="en-US" sz="1000" dirty="0">
+                <a:solidFill>
+                  <a:srgbClr val="6E6A64"/>
+                </a:solidFill>
+                <a:latin typeface="DIN Next Arabic" pitchFamily="34" charset="0"/>
+                <a:ea typeface="DIN Next Arabic" pitchFamily="34" charset="-122"/>
+                <a:cs typeface="DIN Next Arabic" pitchFamily="34" charset="-120"/>
+              </a:rPr>
+              <a:t>ما نطلبه فعلاً</a:t>
+            </a:r>
+            <a:endParaRPr lang="en-US" sz="1000" dirty="0"/>
+          </a:p>
+        </p:txBody>
+      </p:sp>
+      <p:sp>
+        <p:nvSpPr>
+          <p:cNvPr id="29" name="Text 27"/>
+          <p:cNvSpPr/>
+          <p:nvPr/>
+        </p:nvSpPr>
+        <p:spPr>
+          <a:xfrm>
+            <a:off x="1152144" y="2258568"/>
+            <a:ext cx="2249424" cy="329184"/>
+          </a:xfrm>
+          <a:prstGeom prst="rect">
+            <a:avLst/>
+          </a:prstGeom>
+          <a:noFill/>
+          <a:ln/>
+        </p:spPr>
+        <p:txBody>
+          <a:bodyPr wrap="square" lIns="0" tIns="0" rIns="0" bIns="0" rtlCol="0" anchor="ctr"/>
+          <a:lstStyle/>
+          <a:p>
+            <a:pPr algn="ctr" indent="0" marL="0">
+              <a:buNone/>
+            </a:pPr>
+            <a:r>
+              <a:rPr lang="en-US" sz="1150" b="1" dirty="0">
+                <a:solidFill>
+                  <a:srgbClr val="55565A"/>
+                </a:solidFill>
+                <a:latin typeface="DIN Next Arabic" pitchFamily="34" charset="0"/>
+                <a:ea typeface="DIN Next Arabic" pitchFamily="34" charset="-122"/>
+                <a:cs typeface="DIN Next Arabic" pitchFamily="34" charset="-120"/>
+              </a:rPr>
+              <a:t>فاقد ذروة وردية المساء</a:t>
+            </a:r>
+            <a:endParaRPr lang="en-US" sz="1150" dirty="0"/>
+          </a:p>
+        </p:txBody>
+      </p:sp>
+      <p:sp>
+        <p:nvSpPr>
+          <p:cNvPr id="30" name="Text 28"/>
+          <p:cNvSpPr/>
+          <p:nvPr/>
+        </p:nvSpPr>
+        <p:spPr>
+          <a:xfrm>
+            <a:off x="1152144" y="2569464"/>
+            <a:ext cx="2249424" cy="237744"/>
+          </a:xfrm>
+          <a:prstGeom prst="rect">
+            <a:avLst/>
+          </a:prstGeom>
+          <a:noFill/>
+          <a:ln/>
+        </p:spPr>
+        <p:txBody>
+          <a:bodyPr wrap="square" lIns="0" tIns="0" rIns="0" bIns="0" rtlCol="0" anchor="ctr"/>
+          <a:lstStyle/>
+          <a:p>
+            <a:pPr algn="ctr" indent="0" marL="0">
+              <a:buNone/>
+            </a:pPr>
+            <a:r>
+              <a:rPr lang="en-US" sz="1250" b="1" dirty="0">
+                <a:solidFill>
+                  <a:srgbClr val="2E8B6F"/>
+                </a:solidFill>
+                <a:latin typeface="DIN Next Arabic" pitchFamily="34" charset="0"/>
+                <a:ea typeface="DIN Next Arabic" pitchFamily="34" charset="-122"/>
+                <a:cs typeface="DIN Next Arabic" pitchFamily="34" charset="-120"/>
+              </a:rPr>
+              <a:t>٥١ معاملة تُستردّ</a:t>
+            </a:r>
+            <a:endParaRPr lang="en-US" sz="1250" dirty="0"/>
+          </a:p>
+        </p:txBody>
+      </p:sp>
+      <p:sp>
+        <p:nvSpPr>
+          <p:cNvPr id="31" name="Text 29"/>
+          <p:cNvSpPr/>
+          <p:nvPr/>
+        </p:nvSpPr>
+        <p:spPr>
+          <a:xfrm>
+            <a:off x="566928" y="3255264"/>
+            <a:ext cx="11027664" cy="274320"/>
+          </a:xfrm>
+          <a:prstGeom prst="rect">
+            <a:avLst/>
+          </a:prstGeom>
+          <a:noFill/>
+          <a:ln/>
+        </p:spPr>
+        <p:txBody>
+          <a:bodyPr wrap="square" rtlCol="0" anchor="ctr"/>
+          <a:lstStyle/>
+          <a:p>
+            <a:pPr rtl="1" algn="r" indent="0" marL="0">
+              <a:buNone/>
+            </a:pPr>
+            <a:r>
+              <a:rPr lang="en-US" sz="1350" b="1" dirty="0">
+                <a:solidFill>
+                  <a:srgbClr val="F5831F"/>
+                </a:solidFill>
+                <a:latin typeface="DIN Next Arabic" pitchFamily="34" charset="0"/>
+                <a:ea typeface="DIN Next Arabic" pitchFamily="34" charset="-122"/>
+                <a:cs typeface="DIN Next Arabic" pitchFamily="34" charset="-120"/>
+              </a:rPr>
+              <a:t>② الأرقام — كلها بالمعاملة</a:t>
+            </a:r>
+            <a:endParaRPr lang="en-US" sz="1350" dirty="0"/>
+          </a:p>
+        </p:txBody>
+      </p:sp>
+      <p:sp>
+        <p:nvSpPr>
+          <p:cNvPr id="32" name="Shape 30"/>
+          <p:cNvSpPr/>
+          <p:nvPr/>
+        </p:nvSpPr>
+        <p:spPr>
+          <a:xfrm>
+            <a:off x="566928" y="3529584"/>
             <a:ext cx="11027664" cy="384048"/>
           </a:xfrm>
           <a:prstGeom prst="rect">
@@ -22999,14 +23809,14 @@
       </p:sp>
       <p:sp>
         <p:nvSpPr>
-          <p:cNvPr id="11" name="Text 9"/>
-          <p:cNvSpPr/>
-          <p:nvPr/>
-        </p:nvSpPr>
-        <p:spPr>
-          <a:xfrm>
-            <a:off x="9830166" y="2331720"/>
-            <a:ext cx="1764426" cy="384048"/>
+          <p:cNvPr id="33" name="Text 31"/>
+          <p:cNvSpPr/>
+          <p:nvPr/>
+        </p:nvSpPr>
+        <p:spPr>
+          <a:xfrm>
+            <a:off x="9988622" y="3529584"/>
+            <a:ext cx="1605970" cy="384048"/>
           </a:xfrm>
           <a:prstGeom prst="rect">
             <a:avLst/>
@@ -23022,7 +23832,7 @@
               <a:buNone/>
             </a:pPr>
             <a:r>
-              <a:rPr lang="en-US" sz="1000" b="1" dirty="0">
+              <a:rPr lang="en-US" sz="950" b="1" dirty="0">
                 <a:solidFill>
                   <a:srgbClr val="FFFFFF"/>
                 </a:solidFill>
@@ -23032,20 +23842,20 @@
               </a:rPr>
               <a:t>المحطة</a:t>
             </a:r>
-            <a:endParaRPr lang="en-US" sz="1000" dirty="0"/>
-          </a:p>
-        </p:txBody>
-      </p:sp>
-      <p:sp>
-        <p:nvSpPr>
-          <p:cNvPr id="12" name="Text 10"/>
-          <p:cNvSpPr/>
-          <p:nvPr/>
-        </p:nvSpPr>
-        <p:spPr>
-          <a:xfrm>
-            <a:off x="8947953" y="2331720"/>
-            <a:ext cx="882213" cy="384048"/>
+            <a:endParaRPr lang="en-US" sz="950" dirty="0"/>
+          </a:p>
+        </p:txBody>
+      </p:sp>
+      <p:sp>
+        <p:nvSpPr>
+          <p:cNvPr id="34" name="Text 32"/>
+          <p:cNvSpPr/>
+          <p:nvPr/>
+        </p:nvSpPr>
+        <p:spPr>
+          <a:xfrm>
+            <a:off x="9132104" y="3529584"/>
+            <a:ext cx="856518" cy="384048"/>
           </a:xfrm>
           <a:prstGeom prst="rect">
             <a:avLst/>
@@ -23061,7 +23871,7 @@
               <a:buNone/>
             </a:pPr>
             <a:r>
-              <a:rPr lang="en-US" sz="1000" b="1" dirty="0">
+              <a:rPr lang="en-US" sz="950" b="1" dirty="0">
                 <a:solidFill>
                   <a:srgbClr val="FFFFFF"/>
                 </a:solidFill>
@@ -23071,20 +23881,20 @@
               </a:rPr>
               <a:t>الكود</a:t>
             </a:r>
-            <a:endParaRPr lang="en-US" sz="1000" dirty="0"/>
-          </a:p>
-        </p:txBody>
-      </p:sp>
-      <p:sp>
-        <p:nvSpPr>
-          <p:cNvPr id="13" name="Text 11"/>
-          <p:cNvSpPr/>
-          <p:nvPr/>
-        </p:nvSpPr>
-        <p:spPr>
-          <a:xfrm>
-            <a:off x="7845186" y="2331720"/>
-            <a:ext cx="1102766" cy="384048"/>
+            <a:endParaRPr lang="en-US" sz="950" dirty="0"/>
+          </a:p>
+        </p:txBody>
+      </p:sp>
+      <p:sp>
+        <p:nvSpPr>
+          <p:cNvPr id="35" name="Text 33"/>
+          <p:cNvSpPr/>
+          <p:nvPr/>
+        </p:nvSpPr>
+        <p:spPr>
+          <a:xfrm>
+            <a:off x="7847328" y="3529584"/>
+            <a:ext cx="1284776" cy="384048"/>
           </a:xfrm>
           <a:prstGeom prst="rect">
             <a:avLst/>
@@ -23100,7 +23910,7 @@
               <a:buNone/>
             </a:pPr>
             <a:r>
-              <a:rPr lang="en-US" sz="1000" b="1" dirty="0">
+              <a:rPr lang="en-US" sz="950" b="1" dirty="0">
                 <a:solidFill>
                   <a:srgbClr val="FFFFFF"/>
                 </a:solidFill>
@@ -23108,22 +23918,22 @@
                 <a:ea typeface="DIN Next Arabic" pitchFamily="34" charset="-122"/>
                 <a:cs typeface="DIN Next Arabic" pitchFamily="34" charset="-120"/>
               </a:rPr>
-              <a:t>زيارة/يوم</a:t>
-            </a:r>
-            <a:endParaRPr lang="en-US" sz="1000" dirty="0"/>
-          </a:p>
-        </p:txBody>
-      </p:sp>
-      <p:sp>
-        <p:nvSpPr>
-          <p:cNvPr id="14" name="Text 12"/>
-          <p:cNvSpPr/>
-          <p:nvPr/>
-        </p:nvSpPr>
-        <p:spPr>
-          <a:xfrm>
-            <a:off x="6742420" y="2331720"/>
-            <a:ext cx="1102766" cy="384048"/>
+              <a:t>معاملات المحطة/يوم</a:t>
+            </a:r>
+            <a:endParaRPr lang="en-US" sz="950" dirty="0"/>
+          </a:p>
+        </p:txBody>
+      </p:sp>
+      <p:sp>
+        <p:nvSpPr>
+          <p:cNvPr id="36" name="Text 34"/>
+          <p:cNvSpPr/>
+          <p:nvPr/>
+        </p:nvSpPr>
+        <p:spPr>
+          <a:xfrm>
+            <a:off x="6776681" y="3529584"/>
+            <a:ext cx="1070647" cy="384048"/>
           </a:xfrm>
           <a:prstGeom prst="rect">
             <a:avLst/>
@@ -23139,7 +23949,7 @@
               <a:buNone/>
             </a:pPr>
             <a:r>
-              <a:rPr lang="en-US" sz="1000" b="1" dirty="0">
+              <a:rPr lang="en-US" sz="950" b="1" dirty="0">
                 <a:solidFill>
                   <a:srgbClr val="FFFFFF"/>
                 </a:solidFill>
@@ -23147,22 +23957,22 @@
                 <a:ea typeface="DIN Next Arabic" pitchFamily="34" charset="-122"/>
                 <a:cs typeface="DIN Next Arabic" pitchFamily="34" charset="-120"/>
               </a:rPr>
-              <a:t>حصة المساء</a:t>
-            </a:r>
-            <a:endParaRPr lang="en-US" sz="1000" dirty="0"/>
-          </a:p>
-        </p:txBody>
-      </p:sp>
-      <p:sp>
-        <p:nvSpPr>
-          <p:cNvPr id="15" name="Text 13"/>
-          <p:cNvSpPr/>
-          <p:nvPr/>
-        </p:nvSpPr>
-        <p:spPr>
-          <a:xfrm>
-            <a:off x="5639653" y="2331720"/>
-            <a:ext cx="1102766" cy="384048"/>
+              <a:t>منها صباحاً</a:t>
+            </a:r>
+            <a:endParaRPr lang="en-US" sz="950" dirty="0"/>
+          </a:p>
+        </p:txBody>
+      </p:sp>
+      <p:sp>
+        <p:nvSpPr>
+          <p:cNvPr id="37" name="Text 35"/>
+          <p:cNvSpPr/>
+          <p:nvPr/>
+        </p:nvSpPr>
+        <p:spPr>
+          <a:xfrm>
+            <a:off x="5706034" y="3529584"/>
+            <a:ext cx="1070647" cy="384048"/>
           </a:xfrm>
           <a:prstGeom prst="rect">
             <a:avLst/>
@@ -23178,7 +23988,7 @@
               <a:buNone/>
             </a:pPr>
             <a:r>
-              <a:rPr lang="en-US" sz="1000" b="1" dirty="0">
+              <a:rPr lang="en-US" sz="950" b="1" dirty="0">
                 <a:solidFill>
                   <a:srgbClr val="FFFFFF"/>
                 </a:solidFill>
@@ -23186,22 +23996,22 @@
                 <a:ea typeface="DIN Next Arabic" pitchFamily="34" charset="-122"/>
                 <a:cs typeface="DIN Next Arabic" pitchFamily="34" charset="-120"/>
               </a:rPr>
-              <a:t>عمال ص/م</a:t>
-            </a:r>
-            <a:endParaRPr lang="en-US" sz="1000" dirty="0"/>
-          </a:p>
-        </p:txBody>
-      </p:sp>
-      <p:sp>
-        <p:nvSpPr>
-          <p:cNvPr id="16" name="Text 14"/>
-          <p:cNvSpPr/>
-          <p:nvPr/>
-        </p:nvSpPr>
-        <p:spPr>
-          <a:xfrm>
-            <a:off x="4206057" y="2331720"/>
-            <a:ext cx="1433596" cy="384048"/>
+              <a:t>منها مساءً</a:t>
+            </a:r>
+            <a:endParaRPr lang="en-US" sz="950" dirty="0"/>
+          </a:p>
+        </p:txBody>
+      </p:sp>
+      <p:sp>
+        <p:nvSpPr>
+          <p:cNvPr id="38" name="Text 36"/>
+          <p:cNvSpPr/>
+          <p:nvPr/>
+        </p:nvSpPr>
+        <p:spPr>
+          <a:xfrm>
+            <a:off x="4742451" y="3529584"/>
+            <a:ext cx="963582" cy="384048"/>
           </a:xfrm>
           <a:prstGeom prst="rect">
             <a:avLst/>
@@ -23217,7 +24027,7 @@
               <a:buNone/>
             </a:pPr>
             <a:r>
-              <a:rPr lang="en-US" sz="1000" b="1" dirty="0">
+              <a:rPr lang="en-US" sz="950" b="1" dirty="0">
                 <a:solidFill>
                   <a:srgbClr val="FFFFFF"/>
                 </a:solidFill>
@@ -23225,22 +24035,22 @@
                 <a:ea typeface="DIN Next Arabic" pitchFamily="34" charset="-122"/>
                 <a:cs typeface="DIN Next Arabic" pitchFamily="34" charset="-120"/>
               </a:rPr>
-              <a:t>مستهدف الصباحي</a:t>
-            </a:r>
-            <a:endParaRPr lang="en-US" sz="1000" dirty="0"/>
-          </a:p>
-        </p:txBody>
-      </p:sp>
-      <p:sp>
-        <p:nvSpPr>
-          <p:cNvPr id="17" name="Text 15"/>
-          <p:cNvSpPr/>
-          <p:nvPr/>
-        </p:nvSpPr>
-        <p:spPr>
-          <a:xfrm>
-            <a:off x="2772461" y="2331720"/>
-            <a:ext cx="1433596" cy="384048"/>
+              <a:t>عمال ص / م</a:t>
+            </a:r>
+            <a:endParaRPr lang="en-US" sz="950" dirty="0"/>
+          </a:p>
+        </p:txBody>
+      </p:sp>
+      <p:sp>
+        <p:nvSpPr>
+          <p:cNvPr id="39" name="Text 37"/>
+          <p:cNvSpPr/>
+          <p:nvPr/>
+        </p:nvSpPr>
+        <p:spPr>
+          <a:xfrm>
+            <a:off x="3671804" y="3529584"/>
+            <a:ext cx="1070647" cy="384048"/>
           </a:xfrm>
           <a:prstGeom prst="rect">
             <a:avLst/>
@@ -23256,7 +24066,7 @@
               <a:buNone/>
             </a:pPr>
             <a:r>
-              <a:rPr lang="en-US" sz="1000" b="1" dirty="0">
+              <a:rPr lang="en-US" sz="950" b="1" dirty="0">
                 <a:solidFill>
                   <a:srgbClr val="FFFFFF"/>
                 </a:solidFill>
@@ -23264,22 +24074,22 @@
                 <a:ea typeface="DIN Next Arabic" pitchFamily="34" charset="-122"/>
                 <a:cs typeface="DIN Next Arabic" pitchFamily="34" charset="-120"/>
               </a:rPr>
-              <a:t>مستهدف المسائي</a:t>
-            </a:r>
-            <a:endParaRPr lang="en-US" sz="1000" dirty="0"/>
-          </a:p>
-        </p:txBody>
-      </p:sp>
-      <p:sp>
-        <p:nvSpPr>
-          <p:cNvPr id="18" name="Text 16"/>
-          <p:cNvSpPr/>
-          <p:nvPr/>
-        </p:nvSpPr>
-        <p:spPr>
-          <a:xfrm>
-            <a:off x="1669694" y="2331720"/>
-            <a:ext cx="1102766" cy="384048"/>
+              <a:t>عبء الصباحي</a:t>
+            </a:r>
+            <a:endParaRPr lang="en-US" sz="950" dirty="0"/>
+          </a:p>
+        </p:txBody>
+      </p:sp>
+      <p:sp>
+        <p:nvSpPr>
+          <p:cNvPr id="40" name="Text 38"/>
+          <p:cNvSpPr/>
+          <p:nvPr/>
+        </p:nvSpPr>
+        <p:spPr>
+          <a:xfrm>
+            <a:off x="2601157" y="3529584"/>
+            <a:ext cx="1070647" cy="384048"/>
           </a:xfrm>
           <a:prstGeom prst="rect">
             <a:avLst/>
@@ -23295,7 +24105,7 @@
               <a:buNone/>
             </a:pPr>
             <a:r>
-              <a:rPr lang="en-US" sz="1000" b="1" dirty="0">
+              <a:rPr lang="en-US" sz="950" b="1" dirty="0">
                 <a:solidFill>
                   <a:srgbClr val="FFFFFF"/>
                 </a:solidFill>
@@ -23303,22 +24113,22 @@
                 <a:ea typeface="DIN Next Arabic" pitchFamily="34" charset="-122"/>
                 <a:cs typeface="DIN Next Arabic" pitchFamily="34" charset="-120"/>
               </a:rPr>
-              <a:t>لتر/زيارة</a:t>
-            </a:r>
-            <a:endParaRPr lang="en-US" sz="1000" dirty="0"/>
-          </a:p>
-        </p:txBody>
-      </p:sp>
-      <p:sp>
-        <p:nvSpPr>
-          <p:cNvPr id="19" name="Text 17"/>
-          <p:cNvSpPr/>
-          <p:nvPr/>
-        </p:nvSpPr>
-        <p:spPr>
-          <a:xfrm>
-            <a:off x="566928" y="2331720"/>
-            <a:ext cx="1102766" cy="384048"/>
+              <a:t>عبء المسائي</a:t>
+            </a:r>
+            <a:endParaRPr lang="en-US" sz="950" dirty="0"/>
+          </a:p>
+        </p:txBody>
+      </p:sp>
+      <p:sp>
+        <p:nvSpPr>
+          <p:cNvPr id="41" name="Text 39"/>
+          <p:cNvSpPr/>
+          <p:nvPr/>
+        </p:nvSpPr>
+        <p:spPr>
+          <a:xfrm>
+            <a:off x="1744640" y="3529584"/>
+            <a:ext cx="856518" cy="384048"/>
           </a:xfrm>
           <a:prstGeom prst="rect">
             <a:avLst/>
@@ -23334,7 +24144,7 @@
               <a:buNone/>
             </a:pPr>
             <a:r>
-              <a:rPr lang="en-US" sz="1000" b="1" dirty="0">
+              <a:rPr lang="en-US" sz="950" b="1" dirty="0">
                 <a:solidFill>
                   <a:srgbClr val="FFFFFF"/>
                 </a:solidFill>
@@ -23342,22 +24152,61 @@
                 <a:ea typeface="DIN Next Arabic" pitchFamily="34" charset="-122"/>
                 <a:cs typeface="DIN Next Arabic" pitchFamily="34" charset="-120"/>
               </a:rPr>
-              <a:t>المستهدف</a:t>
-            </a:r>
-            <a:endParaRPr lang="en-US" sz="1000" dirty="0"/>
-          </a:p>
-        </p:txBody>
-      </p:sp>
-      <p:sp>
-        <p:nvSpPr>
-          <p:cNvPr id="20" name="Shape 18"/>
-          <p:cNvSpPr/>
-          <p:nvPr/>
-        </p:nvSpPr>
-        <p:spPr>
-          <a:xfrm>
-            <a:off x="566928" y="2715768"/>
-            <a:ext cx="11027664" cy="365760"/>
+              <a:t>الفارق</a:t>
+            </a:r>
+            <a:endParaRPr lang="en-US" sz="950" dirty="0"/>
+          </a:p>
+        </p:txBody>
+      </p:sp>
+      <p:sp>
+        <p:nvSpPr>
+          <p:cNvPr id="42" name="Text 40"/>
+          <p:cNvSpPr/>
+          <p:nvPr/>
+        </p:nvSpPr>
+        <p:spPr>
+          <a:xfrm>
+            <a:off x="566928" y="3529584"/>
+            <a:ext cx="1177712" cy="384048"/>
+          </a:xfrm>
+          <a:prstGeom prst="rect">
+            <a:avLst/>
+          </a:prstGeom>
+          <a:noFill/>
+          <a:ln/>
+        </p:spPr>
+        <p:txBody>
+          <a:bodyPr wrap="square" lIns="0" tIns="762" rIns="762" bIns="0" rtlCol="0" anchor="ctr"/>
+          <a:lstStyle/>
+          <a:p>
+            <a:pPr rtl="1" algn="ctr" indent="0" marL="0">
+              <a:buNone/>
+            </a:pPr>
+            <a:r>
+              <a:rPr lang="en-US" sz="950" b="1" dirty="0">
+                <a:solidFill>
+                  <a:srgbClr val="FFFFFF"/>
+                </a:solidFill>
+                <a:latin typeface="DIN Next Arabic" pitchFamily="34" charset="0"/>
+                <a:ea typeface="DIN Next Arabic" pitchFamily="34" charset="-122"/>
+                <a:cs typeface="DIN Next Arabic" pitchFamily="34" charset="-120"/>
+              </a:rPr>
+              <a:t>المستهدف اليومي</a:t>
+            </a:r>
+            <a:endParaRPr lang="en-US" sz="950" dirty="0"/>
+          </a:p>
+        </p:txBody>
+      </p:sp>
+      <p:sp>
+        <p:nvSpPr>
+          <p:cNvPr id="43" name="Shape 41"/>
+          <p:cNvSpPr/>
+          <p:nvPr/>
+        </p:nvSpPr>
+        <p:spPr>
+          <a:xfrm>
+            <a:off x="566928" y="3913632"/>
+            <a:ext cx="11027664" cy="306324"/>
           </a:xfrm>
           <a:prstGeom prst="rect">
             <a:avLst/>
@@ -23375,14 +24224,14 @@
       </p:sp>
       <p:sp>
         <p:nvSpPr>
-          <p:cNvPr id="21" name="Text 19"/>
-          <p:cNvSpPr/>
-          <p:nvPr/>
-        </p:nvSpPr>
-        <p:spPr>
-          <a:xfrm>
-            <a:off x="9830166" y="2715768"/>
-            <a:ext cx="1764426" cy="365760"/>
+          <p:cNvPr id="44" name="Text 42"/>
+          <p:cNvSpPr/>
+          <p:nvPr/>
+        </p:nvSpPr>
+        <p:spPr>
+          <a:xfrm>
+            <a:off x="9988622" y="3913632"/>
+            <a:ext cx="1605970" cy="306324"/>
           </a:xfrm>
           <a:prstGeom prst="rect">
             <a:avLst/>
@@ -23398,7 +24247,7 @@
               <a:buNone/>
             </a:pPr>
             <a:r>
-              <a:rPr lang="en-US" sz="1100" b="1" dirty="0">
+              <a:rPr lang="en-US" sz="1050" b="1" dirty="0">
                 <a:solidFill>
                   <a:srgbClr val="3D3D3D"/>
                 </a:solidFill>
@@ -23408,20 +24257,20 @@
               </a:rPr>
               <a:t>العمرة الجديدة</a:t>
             </a:r>
-            <a:endParaRPr lang="en-US" sz="1100" dirty="0"/>
-          </a:p>
-        </p:txBody>
-      </p:sp>
-      <p:sp>
-        <p:nvSpPr>
-          <p:cNvPr id="22" name="Text 20"/>
-          <p:cNvSpPr/>
-          <p:nvPr/>
-        </p:nvSpPr>
-        <p:spPr>
-          <a:xfrm>
-            <a:off x="8947953" y="2715768"/>
-            <a:ext cx="882213" cy="365760"/>
+            <a:endParaRPr lang="en-US" sz="1050" dirty="0"/>
+          </a:p>
+        </p:txBody>
+      </p:sp>
+      <p:sp>
+        <p:nvSpPr>
+          <p:cNvPr id="45" name="Text 43"/>
+          <p:cNvSpPr/>
+          <p:nvPr/>
+        </p:nvSpPr>
+        <p:spPr>
+          <a:xfrm>
+            <a:off x="9132104" y="3913632"/>
+            <a:ext cx="856518" cy="306324"/>
           </a:xfrm>
           <a:prstGeom prst="rect">
             <a:avLst/>
@@ -23437,7 +24286,7 @@
               <a:buNone/>
             </a:pPr>
             <a:r>
-              <a:rPr lang="en-US" sz="1100" dirty="0">
+              <a:rPr lang="en-US" sz="1050" dirty="0">
                 <a:solidFill>
                   <a:srgbClr val="3D3D3D"/>
                 </a:solidFill>
@@ -23447,20 +24296,20 @@
               </a:rPr>
               <a:t>MK007</a:t>
             </a:r>
-            <a:endParaRPr lang="en-US" sz="1100" dirty="0"/>
-          </a:p>
-        </p:txBody>
-      </p:sp>
-      <p:sp>
-        <p:nvSpPr>
-          <p:cNvPr id="23" name="Text 21"/>
-          <p:cNvSpPr/>
-          <p:nvPr/>
-        </p:nvSpPr>
-        <p:spPr>
-          <a:xfrm>
-            <a:off x="7845186" y="2715768"/>
-            <a:ext cx="1102766" cy="365760"/>
+            <a:endParaRPr lang="en-US" sz="1050" dirty="0"/>
+          </a:p>
+        </p:txBody>
+      </p:sp>
+      <p:sp>
+        <p:nvSpPr>
+          <p:cNvPr id="46" name="Text 44"/>
+          <p:cNvSpPr/>
+          <p:nvPr/>
+        </p:nvSpPr>
+        <p:spPr>
+          <a:xfrm>
+            <a:off x="7847328" y="3913632"/>
+            <a:ext cx="1284776" cy="306324"/>
           </a:xfrm>
           <a:prstGeom prst="rect">
             <a:avLst/>
@@ -23476,7 +24325,7 @@
               <a:buNone/>
             </a:pPr>
             <a:r>
-              <a:rPr lang="en-US" sz="1100" dirty="0">
+              <a:rPr lang="en-US" sz="1050" dirty="0">
                 <a:solidFill>
                   <a:srgbClr val="3D3D3D"/>
                 </a:solidFill>
@@ -23486,20 +24335,20 @@
               </a:rPr>
               <a:t>٤٬٢٦١</a:t>
             </a:r>
-            <a:endParaRPr lang="en-US" sz="1100" dirty="0"/>
-          </a:p>
-        </p:txBody>
-      </p:sp>
-      <p:sp>
-        <p:nvSpPr>
-          <p:cNvPr id="24" name="Text 22"/>
-          <p:cNvSpPr/>
-          <p:nvPr/>
-        </p:nvSpPr>
-        <p:spPr>
-          <a:xfrm>
-            <a:off x="6742420" y="2715768"/>
-            <a:ext cx="1102766" cy="365760"/>
+            <a:endParaRPr lang="en-US" sz="1050" dirty="0"/>
+          </a:p>
+        </p:txBody>
+      </p:sp>
+      <p:sp>
+        <p:nvSpPr>
+          <p:cNvPr id="47" name="Text 45"/>
+          <p:cNvSpPr/>
+          <p:nvPr/>
+        </p:nvSpPr>
+        <p:spPr>
+          <a:xfrm>
+            <a:off x="6776681" y="3913632"/>
+            <a:ext cx="1070647" cy="306324"/>
           </a:xfrm>
           <a:prstGeom prst="rect">
             <a:avLst/>
@@ -23515,7 +24364,7 @@
               <a:buNone/>
             </a:pPr>
             <a:r>
-              <a:rPr lang="en-US" sz="1100" dirty="0">
+              <a:rPr lang="en-US" sz="1050" dirty="0">
                 <a:solidFill>
                   <a:srgbClr val="3D3D3D"/>
                 </a:solidFill>
@@ -23523,22 +24372,22 @@
                 <a:ea typeface="DIN Next Arabic" pitchFamily="34" charset="-122"/>
                 <a:cs typeface="DIN Next Arabic" pitchFamily="34" charset="-120"/>
               </a:rPr>
-              <a:t>٥١٫٠٪</a:t>
-            </a:r>
-            <a:endParaRPr lang="en-US" sz="1100" dirty="0"/>
-          </a:p>
-        </p:txBody>
-      </p:sp>
-      <p:sp>
-        <p:nvSpPr>
-          <p:cNvPr id="25" name="Text 23"/>
-          <p:cNvSpPr/>
-          <p:nvPr/>
-        </p:nvSpPr>
-        <p:spPr>
-          <a:xfrm>
-            <a:off x="5639653" y="2715768"/>
-            <a:ext cx="1102766" cy="365760"/>
+              <a:t>٢٬٠٨٧</a:t>
+            </a:r>
+            <a:endParaRPr lang="en-US" sz="1050" dirty="0"/>
+          </a:p>
+        </p:txBody>
+      </p:sp>
+      <p:sp>
+        <p:nvSpPr>
+          <p:cNvPr id="48" name="Text 46"/>
+          <p:cNvSpPr/>
+          <p:nvPr/>
+        </p:nvSpPr>
+        <p:spPr>
+          <a:xfrm>
+            <a:off x="5706034" y="3913632"/>
+            <a:ext cx="1070647" cy="306324"/>
           </a:xfrm>
           <a:prstGeom prst="rect">
             <a:avLst/>
@@ -23554,7 +24403,7 @@
               <a:buNone/>
             </a:pPr>
             <a:r>
-              <a:rPr lang="en-US" sz="1100" dirty="0">
+              <a:rPr lang="en-US" sz="1050" dirty="0">
                 <a:solidFill>
                   <a:srgbClr val="3D3D3D"/>
                 </a:solidFill>
@@ -23562,22 +24411,61 @@
                 <a:ea typeface="DIN Next Arabic" pitchFamily="34" charset="-122"/>
                 <a:cs typeface="DIN Next Arabic" pitchFamily="34" charset="-120"/>
               </a:rPr>
+              <a:t>٢٬١٧٤</a:t>
+            </a:r>
+            <a:endParaRPr lang="en-US" sz="1050" dirty="0"/>
+          </a:p>
+        </p:txBody>
+      </p:sp>
+      <p:sp>
+        <p:nvSpPr>
+          <p:cNvPr id="49" name="Text 47"/>
+          <p:cNvSpPr/>
+          <p:nvPr/>
+        </p:nvSpPr>
+        <p:spPr>
+          <a:xfrm>
+            <a:off x="4742451" y="3913632"/>
+            <a:ext cx="963582" cy="306324"/>
+          </a:xfrm>
+          <a:prstGeom prst="rect">
+            <a:avLst/>
+          </a:prstGeom>
+          <a:noFill/>
+          <a:ln/>
+        </p:spPr>
+        <p:txBody>
+          <a:bodyPr wrap="square" lIns="0" tIns="762" rIns="762" bIns="0" rtlCol="0" anchor="ctr"/>
+          <a:lstStyle/>
+          <a:p>
+            <a:pPr rtl="1" algn="ctr" indent="0" marL="0">
+              <a:buNone/>
+            </a:pPr>
+            <a:r>
+              <a:rPr lang="en-US" sz="1050" dirty="0">
+                <a:solidFill>
+                  <a:srgbClr val="3D3D3D"/>
+                </a:solidFill>
+                <a:latin typeface="DIN Next Arabic" pitchFamily="34" charset="0"/>
+                <a:ea typeface="DIN Next Arabic" pitchFamily="34" charset="-122"/>
+                <a:cs typeface="DIN Next Arabic" pitchFamily="34" charset="-120"/>
+              </a:rPr>
               <a:t>١١ / ٩</a:t>
             </a:r>
-            <a:endParaRPr lang="en-US" sz="1100" dirty="0"/>
-          </a:p>
-        </p:txBody>
-      </p:sp>
-      <p:sp>
-        <p:nvSpPr>
-          <p:cNvPr id="26" name="Text 24"/>
-          <p:cNvSpPr/>
-          <p:nvPr/>
-        </p:nvSpPr>
-        <p:spPr>
-          <a:xfrm>
-            <a:off x="4206057" y="2715768"/>
-            <a:ext cx="1433596" cy="365760"/>
+            <a:endParaRPr lang="en-US" sz="1050" dirty="0"/>
+          </a:p>
+        </p:txBody>
+      </p:sp>
+      <p:sp>
+        <p:nvSpPr>
+          <p:cNvPr id="50" name="Text 48"/>
+          <p:cNvSpPr/>
+          <p:nvPr/>
+        </p:nvSpPr>
+        <p:spPr>
+          <a:xfrm>
+            <a:off x="3671804" y="3913632"/>
+            <a:ext cx="1070647" cy="306324"/>
           </a:xfrm>
           <a:prstGeom prst="rect">
             <a:avLst/>
@@ -23593,7 +24481,7 @@
               <a:buNone/>
             </a:pPr>
             <a:r>
-              <a:rPr lang="en-US" sz="1100" b="1" dirty="0">
+              <a:rPr lang="en-US" sz="1050" b="1" dirty="0">
                 <a:solidFill>
                   <a:srgbClr val="3D3D3D"/>
                 </a:solidFill>
@@ -23603,20 +24491,20 @@
               </a:rPr>
               <a:t>١٩٠</a:t>
             </a:r>
-            <a:endParaRPr lang="en-US" sz="1100" dirty="0"/>
-          </a:p>
-        </p:txBody>
-      </p:sp>
-      <p:sp>
-        <p:nvSpPr>
-          <p:cNvPr id="27" name="Text 25"/>
-          <p:cNvSpPr/>
-          <p:nvPr/>
-        </p:nvSpPr>
-        <p:spPr>
-          <a:xfrm>
-            <a:off x="2772461" y="2715768"/>
-            <a:ext cx="1433596" cy="365760"/>
+            <a:endParaRPr lang="en-US" sz="1050" dirty="0"/>
+          </a:p>
+        </p:txBody>
+      </p:sp>
+      <p:sp>
+        <p:nvSpPr>
+          <p:cNvPr id="51" name="Text 49"/>
+          <p:cNvSpPr/>
+          <p:nvPr/>
+        </p:nvSpPr>
+        <p:spPr>
+          <a:xfrm>
+            <a:off x="2601157" y="3913632"/>
+            <a:ext cx="1070647" cy="306324"/>
           </a:xfrm>
           <a:prstGeom prst="rect">
             <a:avLst/>
@@ -23632,7 +24520,7 @@
               <a:buNone/>
             </a:pPr>
             <a:r>
-              <a:rPr lang="en-US" sz="1100" b="1" dirty="0">
+              <a:rPr lang="en-US" sz="1050" b="1" dirty="0">
                 <a:solidFill>
                   <a:srgbClr val="F5831F"/>
                 </a:solidFill>
@@ -23642,20 +24530,20 @@
               </a:rPr>
               <a:t>٢٤٢</a:t>
             </a:r>
-            <a:endParaRPr lang="en-US" sz="1100" dirty="0"/>
-          </a:p>
-        </p:txBody>
-      </p:sp>
-      <p:sp>
-        <p:nvSpPr>
-          <p:cNvPr id="28" name="Text 26"/>
-          <p:cNvSpPr/>
-          <p:nvPr/>
-        </p:nvSpPr>
-        <p:spPr>
-          <a:xfrm>
-            <a:off x="1669694" y="2715768"/>
-            <a:ext cx="1102766" cy="365760"/>
+            <a:endParaRPr lang="en-US" sz="1050" dirty="0"/>
+          </a:p>
+        </p:txBody>
+      </p:sp>
+      <p:sp>
+        <p:nvSpPr>
+          <p:cNvPr id="52" name="Text 50"/>
+          <p:cNvSpPr/>
+          <p:nvPr/>
+        </p:nvSpPr>
+        <p:spPr>
+          <a:xfrm>
+            <a:off x="1744640" y="3913632"/>
+            <a:ext cx="856518" cy="306324"/>
           </a:xfrm>
           <a:prstGeom prst="rect">
             <a:avLst/>
@@ -23671,30 +24559,30 @@
               <a:buNone/>
             </a:pPr>
             <a:r>
-              <a:rPr lang="en-US" sz="1100" dirty="0">
-                <a:solidFill>
-                  <a:srgbClr val="3D3D3D"/>
-                </a:solidFill>
-                <a:latin typeface="DIN Next Arabic" pitchFamily="34" charset="0"/>
-                <a:ea typeface="DIN Next Arabic" pitchFamily="34" charset="-122"/>
-                <a:cs typeface="DIN Next Arabic" pitchFamily="34" charset="-120"/>
-              </a:rPr>
-              <a:t>٣٠٫٦</a:t>
-            </a:r>
-            <a:endParaRPr lang="en-US" sz="1100" dirty="0"/>
-          </a:p>
-        </p:txBody>
-      </p:sp>
-      <p:sp>
-        <p:nvSpPr>
-          <p:cNvPr id="29" name="Text 27"/>
-          <p:cNvSpPr/>
-          <p:nvPr/>
-        </p:nvSpPr>
-        <p:spPr>
-          <a:xfrm>
-            <a:off x="566928" y="2715768"/>
-            <a:ext cx="1102766" cy="365760"/>
+              <a:rPr lang="en-US" sz="1050" dirty="0">
+                <a:solidFill>
+                  <a:srgbClr val="9A3E2C"/>
+                </a:solidFill>
+                <a:latin typeface="DIN Next Arabic" pitchFamily="34" charset="0"/>
+                <a:ea typeface="DIN Next Arabic" pitchFamily="34" charset="-122"/>
+                <a:cs typeface="DIN Next Arabic" pitchFamily="34" charset="-120"/>
+              </a:rPr>
+              <a:t>+٢٧٪</a:t>
+            </a:r>
+            <a:endParaRPr lang="en-US" sz="1050" dirty="0"/>
+          </a:p>
+        </p:txBody>
+      </p:sp>
+      <p:sp>
+        <p:nvSpPr>
+          <p:cNvPr id="53" name="Text 51"/>
+          <p:cNvSpPr/>
+          <p:nvPr/>
+        </p:nvSpPr>
+        <p:spPr>
+          <a:xfrm>
+            <a:off x="566928" y="3913632"/>
+            <a:ext cx="1177712" cy="306324"/>
           </a:xfrm>
           <a:prstGeom prst="rect">
             <a:avLst/>
@@ -23710,7 +24598,7 @@
               <a:buNone/>
             </a:pPr>
             <a:r>
-              <a:rPr lang="en-US" sz="1100" b="1" dirty="0">
+              <a:rPr lang="en-US" sz="1050" b="1" dirty="0">
                 <a:solidFill>
                   <a:srgbClr val="1F5E4A"/>
                 </a:solidFill>
@@ -23718,22 +24606,22 @@
                 <a:ea typeface="DIN Next Arabic" pitchFamily="34" charset="-122"/>
                 <a:cs typeface="DIN Next Arabic" pitchFamily="34" charset="-120"/>
               </a:rPr>
-              <a:t>٣٣٫٧</a:t>
-            </a:r>
-            <a:endParaRPr lang="en-US" sz="1100" dirty="0"/>
-          </a:p>
-        </p:txBody>
-      </p:sp>
-      <p:sp>
-        <p:nvSpPr>
-          <p:cNvPr id="30" name="Shape 28"/>
-          <p:cNvSpPr/>
-          <p:nvPr/>
-        </p:nvSpPr>
-        <p:spPr>
-          <a:xfrm>
-            <a:off x="566928" y="3081528"/>
-            <a:ext cx="11027664" cy="365760"/>
+              <a:t>٨٥</a:t>
+            </a:r>
+            <a:endParaRPr lang="en-US" sz="1050" dirty="0"/>
+          </a:p>
+        </p:txBody>
+      </p:sp>
+      <p:sp>
+        <p:nvSpPr>
+          <p:cNvPr id="54" name="Shape 52"/>
+          <p:cNvSpPr/>
+          <p:nvPr/>
+        </p:nvSpPr>
+        <p:spPr>
+          <a:xfrm>
+            <a:off x="566928" y="4219956"/>
+            <a:ext cx="11027664" cy="306324"/>
           </a:xfrm>
           <a:prstGeom prst="rect">
             <a:avLst/>
@@ -23751,14 +24639,14 @@
       </p:sp>
       <p:sp>
         <p:nvSpPr>
-          <p:cNvPr id="31" name="Text 29"/>
-          <p:cNvSpPr/>
-          <p:nvPr/>
-        </p:nvSpPr>
-        <p:spPr>
-          <a:xfrm>
-            <a:off x="9830166" y="3081528"/>
-            <a:ext cx="1764426" cy="365760"/>
+          <p:cNvPr id="55" name="Text 53"/>
+          <p:cNvSpPr/>
+          <p:nvPr/>
+        </p:nvSpPr>
+        <p:spPr>
+          <a:xfrm>
+            <a:off x="9988622" y="4219956"/>
+            <a:ext cx="1605970" cy="306324"/>
           </a:xfrm>
           <a:prstGeom prst="rect">
             <a:avLst/>
@@ -23774,7 +24662,7 @@
               <a:buNone/>
             </a:pPr>
             <a:r>
-              <a:rPr lang="en-US" sz="1100" b="1" dirty="0">
+              <a:rPr lang="en-US" sz="1050" b="1" dirty="0">
                 <a:solidFill>
                   <a:srgbClr val="3D3D3D"/>
                 </a:solidFill>
@@ -23784,20 +24672,20 @@
               </a:rPr>
               <a:t>عرفات الشوقية</a:t>
             </a:r>
-            <a:endParaRPr lang="en-US" sz="1100" dirty="0"/>
-          </a:p>
-        </p:txBody>
-      </p:sp>
-      <p:sp>
-        <p:nvSpPr>
-          <p:cNvPr id="32" name="Text 30"/>
-          <p:cNvSpPr/>
-          <p:nvPr/>
-        </p:nvSpPr>
-        <p:spPr>
-          <a:xfrm>
-            <a:off x="8947953" y="3081528"/>
-            <a:ext cx="882213" cy="365760"/>
+            <a:endParaRPr lang="en-US" sz="1050" dirty="0"/>
+          </a:p>
+        </p:txBody>
+      </p:sp>
+      <p:sp>
+        <p:nvSpPr>
+          <p:cNvPr id="56" name="Text 54"/>
+          <p:cNvSpPr/>
+          <p:nvPr/>
+        </p:nvSpPr>
+        <p:spPr>
+          <a:xfrm>
+            <a:off x="9132104" y="4219956"/>
+            <a:ext cx="856518" cy="306324"/>
           </a:xfrm>
           <a:prstGeom prst="rect">
             <a:avLst/>
@@ -23813,7 +24701,7 @@
               <a:buNone/>
             </a:pPr>
             <a:r>
-              <a:rPr lang="en-US" sz="1100" dirty="0">
+              <a:rPr lang="en-US" sz="1050" dirty="0">
                 <a:solidFill>
                   <a:srgbClr val="3D3D3D"/>
                 </a:solidFill>
@@ -23823,20 +24711,20 @@
               </a:rPr>
               <a:t>MK017</a:t>
             </a:r>
-            <a:endParaRPr lang="en-US" sz="1100" dirty="0"/>
-          </a:p>
-        </p:txBody>
-      </p:sp>
-      <p:sp>
-        <p:nvSpPr>
-          <p:cNvPr id="33" name="Text 31"/>
-          <p:cNvSpPr/>
-          <p:nvPr/>
-        </p:nvSpPr>
-        <p:spPr>
-          <a:xfrm>
-            <a:off x="7845186" y="3081528"/>
-            <a:ext cx="1102766" cy="365760"/>
+            <a:endParaRPr lang="en-US" sz="1050" dirty="0"/>
+          </a:p>
+        </p:txBody>
+      </p:sp>
+      <p:sp>
+        <p:nvSpPr>
+          <p:cNvPr id="57" name="Text 55"/>
+          <p:cNvSpPr/>
+          <p:nvPr/>
+        </p:nvSpPr>
+        <p:spPr>
+          <a:xfrm>
+            <a:off x="7847328" y="4219956"/>
+            <a:ext cx="1284776" cy="306324"/>
           </a:xfrm>
           <a:prstGeom prst="rect">
             <a:avLst/>
@@ -23852,7 +24740,7 @@
               <a:buNone/>
             </a:pPr>
             <a:r>
-              <a:rPr lang="en-US" sz="1100" dirty="0">
+              <a:rPr lang="en-US" sz="1050" dirty="0">
                 <a:solidFill>
                   <a:srgbClr val="3D3D3D"/>
                 </a:solidFill>
@@ -23862,20 +24750,20 @@
               </a:rPr>
               <a:t>١٬٢٦٩</a:t>
             </a:r>
-            <a:endParaRPr lang="en-US" sz="1100" dirty="0"/>
-          </a:p>
-        </p:txBody>
-      </p:sp>
-      <p:sp>
-        <p:nvSpPr>
-          <p:cNvPr id="34" name="Text 32"/>
-          <p:cNvSpPr/>
-          <p:nvPr/>
-        </p:nvSpPr>
-        <p:spPr>
-          <a:xfrm>
-            <a:off x="6742420" y="3081528"/>
-            <a:ext cx="1102766" cy="365760"/>
+            <a:endParaRPr lang="en-US" sz="1050" dirty="0"/>
+          </a:p>
+        </p:txBody>
+      </p:sp>
+      <p:sp>
+        <p:nvSpPr>
+          <p:cNvPr id="58" name="Text 56"/>
+          <p:cNvSpPr/>
+          <p:nvPr/>
+        </p:nvSpPr>
+        <p:spPr>
+          <a:xfrm>
+            <a:off x="6776681" y="4219956"/>
+            <a:ext cx="1070647" cy="306324"/>
           </a:xfrm>
           <a:prstGeom prst="rect">
             <a:avLst/>
@@ -23891,7 +24779,7 @@
               <a:buNone/>
             </a:pPr>
             <a:r>
-              <a:rPr lang="en-US" sz="1100" dirty="0">
+              <a:rPr lang="en-US" sz="1050" dirty="0">
                 <a:solidFill>
                   <a:srgbClr val="3D3D3D"/>
                 </a:solidFill>
@@ -23899,22 +24787,22 @@
                 <a:ea typeface="DIN Next Arabic" pitchFamily="34" charset="-122"/>
                 <a:cs typeface="DIN Next Arabic" pitchFamily="34" charset="-120"/>
               </a:rPr>
-              <a:t>٥٥٫٣٪</a:t>
-            </a:r>
-            <a:endParaRPr lang="en-US" sz="1100" dirty="0"/>
-          </a:p>
-        </p:txBody>
-      </p:sp>
-      <p:sp>
-        <p:nvSpPr>
-          <p:cNvPr id="35" name="Text 33"/>
-          <p:cNvSpPr/>
-          <p:nvPr/>
-        </p:nvSpPr>
-        <p:spPr>
-          <a:xfrm>
-            <a:off x="5639653" y="3081528"/>
-            <a:ext cx="1102766" cy="365760"/>
+              <a:t>٥٦٧</a:t>
+            </a:r>
+            <a:endParaRPr lang="en-US" sz="1050" dirty="0"/>
+          </a:p>
+        </p:txBody>
+      </p:sp>
+      <p:sp>
+        <p:nvSpPr>
+          <p:cNvPr id="59" name="Text 57"/>
+          <p:cNvSpPr/>
+          <p:nvPr/>
+        </p:nvSpPr>
+        <p:spPr>
+          <a:xfrm>
+            <a:off x="5706034" y="4219956"/>
+            <a:ext cx="1070647" cy="306324"/>
           </a:xfrm>
           <a:prstGeom prst="rect">
             <a:avLst/>
@@ -23930,7 +24818,7 @@
               <a:buNone/>
             </a:pPr>
             <a:r>
-              <a:rPr lang="en-US" sz="1100" dirty="0">
+              <a:rPr lang="en-US" sz="1050" dirty="0">
                 <a:solidFill>
                   <a:srgbClr val="3D3D3D"/>
                 </a:solidFill>
@@ -23938,22 +24826,61 @@
                 <a:ea typeface="DIN Next Arabic" pitchFamily="34" charset="-122"/>
                 <a:cs typeface="DIN Next Arabic" pitchFamily="34" charset="-120"/>
               </a:rPr>
+              <a:t>٧٠٢</a:t>
+            </a:r>
+            <a:endParaRPr lang="en-US" sz="1050" dirty="0"/>
+          </a:p>
+        </p:txBody>
+      </p:sp>
+      <p:sp>
+        <p:nvSpPr>
+          <p:cNvPr id="60" name="Text 58"/>
+          <p:cNvSpPr/>
+          <p:nvPr/>
+        </p:nvSpPr>
+        <p:spPr>
+          <a:xfrm>
+            <a:off x="4742451" y="4219956"/>
+            <a:ext cx="963582" cy="306324"/>
+          </a:xfrm>
+          <a:prstGeom prst="rect">
+            <a:avLst/>
+          </a:prstGeom>
+          <a:noFill/>
+          <a:ln/>
+        </p:spPr>
+        <p:txBody>
+          <a:bodyPr wrap="square" lIns="0" tIns="762" rIns="762" bIns="0" rtlCol="0" anchor="ctr"/>
+          <a:lstStyle/>
+          <a:p>
+            <a:pPr rtl="1" algn="ctr" indent="0" marL="0">
+              <a:buNone/>
+            </a:pPr>
+            <a:r>
+              <a:rPr lang="en-US" sz="1050" dirty="0">
+                <a:solidFill>
+                  <a:srgbClr val="3D3D3D"/>
+                </a:solidFill>
+                <a:latin typeface="DIN Next Arabic" pitchFamily="34" charset="0"/>
+                <a:ea typeface="DIN Next Arabic" pitchFamily="34" charset="-122"/>
+                <a:cs typeface="DIN Next Arabic" pitchFamily="34" charset="-120"/>
+              </a:rPr>
               <a:t>٣ / ٣</a:t>
             </a:r>
-            <a:endParaRPr lang="en-US" sz="1100" dirty="0"/>
-          </a:p>
-        </p:txBody>
-      </p:sp>
-      <p:sp>
-        <p:nvSpPr>
-          <p:cNvPr id="36" name="Text 34"/>
-          <p:cNvSpPr/>
-          <p:nvPr/>
-        </p:nvSpPr>
-        <p:spPr>
-          <a:xfrm>
-            <a:off x="4206057" y="3081528"/>
-            <a:ext cx="1433596" cy="365760"/>
+            <a:endParaRPr lang="en-US" sz="1050" dirty="0"/>
+          </a:p>
+        </p:txBody>
+      </p:sp>
+      <p:sp>
+        <p:nvSpPr>
+          <p:cNvPr id="61" name="Text 59"/>
+          <p:cNvSpPr/>
+          <p:nvPr/>
+        </p:nvSpPr>
+        <p:spPr>
+          <a:xfrm>
+            <a:off x="3671804" y="4219956"/>
+            <a:ext cx="1070647" cy="306324"/>
           </a:xfrm>
           <a:prstGeom prst="rect">
             <a:avLst/>
@@ -23969,7 +24896,7 @@
               <a:buNone/>
             </a:pPr>
             <a:r>
-              <a:rPr lang="en-US" sz="1100" b="1" dirty="0">
+              <a:rPr lang="en-US" sz="1050" b="1" dirty="0">
                 <a:solidFill>
                   <a:srgbClr val="3D3D3D"/>
                 </a:solidFill>
@@ -23979,20 +24906,20 @@
               </a:rPr>
               <a:t>١٨٩</a:t>
             </a:r>
-            <a:endParaRPr lang="en-US" sz="1100" dirty="0"/>
-          </a:p>
-        </p:txBody>
-      </p:sp>
-      <p:sp>
-        <p:nvSpPr>
-          <p:cNvPr id="37" name="Text 35"/>
-          <p:cNvSpPr/>
-          <p:nvPr/>
-        </p:nvSpPr>
-        <p:spPr>
-          <a:xfrm>
-            <a:off x="2772461" y="3081528"/>
-            <a:ext cx="1433596" cy="365760"/>
+            <a:endParaRPr lang="en-US" sz="1050" dirty="0"/>
+          </a:p>
+        </p:txBody>
+      </p:sp>
+      <p:sp>
+        <p:nvSpPr>
+          <p:cNvPr id="62" name="Text 60"/>
+          <p:cNvSpPr/>
+          <p:nvPr/>
+        </p:nvSpPr>
+        <p:spPr>
+          <a:xfrm>
+            <a:off x="2601157" y="4219956"/>
+            <a:ext cx="1070647" cy="306324"/>
           </a:xfrm>
           <a:prstGeom prst="rect">
             <a:avLst/>
@@ -24008,7 +24935,7 @@
               <a:buNone/>
             </a:pPr>
             <a:r>
-              <a:rPr lang="en-US" sz="1100" b="1" dirty="0">
+              <a:rPr lang="en-US" sz="1050" b="1" dirty="0">
                 <a:solidFill>
                   <a:srgbClr val="F5831F"/>
                 </a:solidFill>
@@ -24018,20 +24945,20 @@
               </a:rPr>
               <a:t>٢٣٤</a:t>
             </a:r>
-            <a:endParaRPr lang="en-US" sz="1100" dirty="0"/>
-          </a:p>
-        </p:txBody>
-      </p:sp>
-      <p:sp>
-        <p:nvSpPr>
-          <p:cNvPr id="38" name="Text 36"/>
-          <p:cNvSpPr/>
-          <p:nvPr/>
-        </p:nvSpPr>
-        <p:spPr>
-          <a:xfrm>
-            <a:off x="1669694" y="3081528"/>
-            <a:ext cx="1102766" cy="365760"/>
+            <a:endParaRPr lang="en-US" sz="1050" dirty="0"/>
+          </a:p>
+        </p:txBody>
+      </p:sp>
+      <p:sp>
+        <p:nvSpPr>
+          <p:cNvPr id="63" name="Text 61"/>
+          <p:cNvSpPr/>
+          <p:nvPr/>
+        </p:nvSpPr>
+        <p:spPr>
+          <a:xfrm>
+            <a:off x="1744640" y="4219956"/>
+            <a:ext cx="856518" cy="306324"/>
           </a:xfrm>
           <a:prstGeom prst="rect">
             <a:avLst/>
@@ -24047,30 +24974,30 @@
               <a:buNone/>
             </a:pPr>
             <a:r>
-              <a:rPr lang="en-US" sz="1100" dirty="0">
-                <a:solidFill>
-                  <a:srgbClr val="3D3D3D"/>
-                </a:solidFill>
-                <a:latin typeface="DIN Next Arabic" pitchFamily="34" charset="0"/>
-                <a:ea typeface="DIN Next Arabic" pitchFamily="34" charset="-122"/>
-                <a:cs typeface="DIN Next Arabic" pitchFamily="34" charset="-120"/>
-              </a:rPr>
-              <a:t>٢١٫١</a:t>
-            </a:r>
-            <a:endParaRPr lang="en-US" sz="1100" dirty="0"/>
-          </a:p>
-        </p:txBody>
-      </p:sp>
-      <p:sp>
-        <p:nvSpPr>
-          <p:cNvPr id="39" name="Text 37"/>
-          <p:cNvSpPr/>
-          <p:nvPr/>
-        </p:nvSpPr>
-        <p:spPr>
-          <a:xfrm>
-            <a:off x="566928" y="3081528"/>
-            <a:ext cx="1102766" cy="365760"/>
+              <a:rPr lang="en-US" sz="1050" dirty="0">
+                <a:solidFill>
+                  <a:srgbClr val="9A3E2C"/>
+                </a:solidFill>
+                <a:latin typeface="DIN Next Arabic" pitchFamily="34" charset="0"/>
+                <a:ea typeface="DIN Next Arabic" pitchFamily="34" charset="-122"/>
+                <a:cs typeface="DIN Next Arabic" pitchFamily="34" charset="-120"/>
+              </a:rPr>
+              <a:t>+٢٤٪</a:t>
+            </a:r>
+            <a:endParaRPr lang="en-US" sz="1050" dirty="0"/>
+          </a:p>
+        </p:txBody>
+      </p:sp>
+      <p:sp>
+        <p:nvSpPr>
+          <p:cNvPr id="64" name="Text 62"/>
+          <p:cNvSpPr/>
+          <p:nvPr/>
+        </p:nvSpPr>
+        <p:spPr>
+          <a:xfrm>
+            <a:off x="566928" y="4219956"/>
+            <a:ext cx="1177712" cy="306324"/>
           </a:xfrm>
           <a:prstGeom prst="rect">
             <a:avLst/>
@@ -24086,7 +25013,7 @@
               <a:buNone/>
             </a:pPr>
             <a:r>
-              <a:rPr lang="en-US" sz="1100" b="1" dirty="0">
+              <a:rPr lang="en-US" sz="1050" b="1" dirty="0">
                 <a:solidFill>
                   <a:srgbClr val="1F5E4A"/>
                 </a:solidFill>
@@ -24094,22 +25021,22 @@
                 <a:ea typeface="DIN Next Arabic" pitchFamily="34" charset="-122"/>
                 <a:cs typeface="DIN Next Arabic" pitchFamily="34" charset="-120"/>
               </a:rPr>
-              <a:t>٢٣٫١</a:t>
-            </a:r>
-            <a:endParaRPr lang="en-US" sz="1100" dirty="0"/>
-          </a:p>
-        </p:txBody>
-      </p:sp>
-      <p:sp>
-        <p:nvSpPr>
-          <p:cNvPr id="40" name="Shape 38"/>
-          <p:cNvSpPr/>
-          <p:nvPr/>
-        </p:nvSpPr>
-        <p:spPr>
-          <a:xfrm>
-            <a:off x="566928" y="3447288"/>
-            <a:ext cx="11027664" cy="365760"/>
+              <a:t>٢</a:t>
+            </a:r>
+            <a:endParaRPr lang="en-US" sz="1050" dirty="0"/>
+          </a:p>
+        </p:txBody>
+      </p:sp>
+      <p:sp>
+        <p:nvSpPr>
+          <p:cNvPr id="65" name="Shape 63"/>
+          <p:cNvSpPr/>
+          <p:nvPr/>
+        </p:nvSpPr>
+        <p:spPr>
+          <a:xfrm>
+            <a:off x="566928" y="4526280"/>
+            <a:ext cx="11027664" cy="306324"/>
           </a:xfrm>
           <a:prstGeom prst="rect">
             <a:avLst/>
@@ -24127,14 +25054,14 @@
       </p:sp>
       <p:sp>
         <p:nvSpPr>
-          <p:cNvPr id="41" name="Text 39"/>
-          <p:cNvSpPr/>
-          <p:nvPr/>
-        </p:nvSpPr>
-        <p:spPr>
-          <a:xfrm>
-            <a:off x="9830166" y="3447288"/>
-            <a:ext cx="1764426" cy="365760"/>
+          <p:cNvPr id="66" name="Text 64"/>
+          <p:cNvSpPr/>
+          <p:nvPr/>
+        </p:nvSpPr>
+        <p:spPr>
+          <a:xfrm>
+            <a:off x="9988622" y="4526280"/>
+            <a:ext cx="1605970" cy="306324"/>
           </a:xfrm>
           <a:prstGeom prst="rect">
             <a:avLst/>
@@ -24150,7 +25077,7 @@
               <a:buNone/>
             </a:pPr>
             <a:r>
-              <a:rPr lang="en-US" sz="1100" b="1" dirty="0">
+              <a:rPr lang="en-US" sz="1050" b="1" dirty="0">
                 <a:solidFill>
                   <a:srgbClr val="3D3D3D"/>
                 </a:solidFill>
@@ -24160,20 +25087,20 @@
               </a:rPr>
               <a:t>المعيصم</a:t>
             </a:r>
-            <a:endParaRPr lang="en-US" sz="1100" dirty="0"/>
-          </a:p>
-        </p:txBody>
-      </p:sp>
-      <p:sp>
-        <p:nvSpPr>
-          <p:cNvPr id="42" name="Text 40"/>
-          <p:cNvSpPr/>
-          <p:nvPr/>
-        </p:nvSpPr>
-        <p:spPr>
-          <a:xfrm>
-            <a:off x="8947953" y="3447288"/>
-            <a:ext cx="882213" cy="365760"/>
+            <a:endParaRPr lang="en-US" sz="1050" dirty="0"/>
+          </a:p>
+        </p:txBody>
+      </p:sp>
+      <p:sp>
+        <p:nvSpPr>
+          <p:cNvPr id="67" name="Text 65"/>
+          <p:cNvSpPr/>
+          <p:nvPr/>
+        </p:nvSpPr>
+        <p:spPr>
+          <a:xfrm>
+            <a:off x="9132104" y="4526280"/>
+            <a:ext cx="856518" cy="306324"/>
           </a:xfrm>
           <a:prstGeom prst="rect">
             <a:avLst/>
@@ -24189,7 +25116,7 @@
               <a:buNone/>
             </a:pPr>
             <a:r>
-              <a:rPr lang="en-US" sz="1100" dirty="0">
+              <a:rPr lang="en-US" sz="1050" dirty="0">
                 <a:solidFill>
                   <a:srgbClr val="3D3D3D"/>
                 </a:solidFill>
@@ -24199,20 +25126,20 @@
               </a:rPr>
               <a:t>MK002</a:t>
             </a:r>
-            <a:endParaRPr lang="en-US" sz="1100" dirty="0"/>
-          </a:p>
-        </p:txBody>
-      </p:sp>
-      <p:sp>
-        <p:nvSpPr>
-          <p:cNvPr id="43" name="Text 41"/>
-          <p:cNvSpPr/>
-          <p:nvPr/>
-        </p:nvSpPr>
-        <p:spPr>
-          <a:xfrm>
-            <a:off x="7845186" y="3447288"/>
-            <a:ext cx="1102766" cy="365760"/>
+            <a:endParaRPr lang="en-US" sz="1050" dirty="0"/>
+          </a:p>
+        </p:txBody>
+      </p:sp>
+      <p:sp>
+        <p:nvSpPr>
+          <p:cNvPr id="68" name="Text 66"/>
+          <p:cNvSpPr/>
+          <p:nvPr/>
+        </p:nvSpPr>
+        <p:spPr>
+          <a:xfrm>
+            <a:off x="7847328" y="4526280"/>
+            <a:ext cx="1284776" cy="306324"/>
           </a:xfrm>
           <a:prstGeom prst="rect">
             <a:avLst/>
@@ -24228,7 +25155,7 @@
               <a:buNone/>
             </a:pPr>
             <a:r>
-              <a:rPr lang="en-US" sz="1100" dirty="0">
+              <a:rPr lang="en-US" sz="1050" dirty="0">
                 <a:solidFill>
                   <a:srgbClr val="3D3D3D"/>
                 </a:solidFill>
@@ -24238,20 +25165,20 @@
               </a:rPr>
               <a:t>٨٦٥</a:t>
             </a:r>
-            <a:endParaRPr lang="en-US" sz="1100" dirty="0"/>
-          </a:p>
-        </p:txBody>
-      </p:sp>
-      <p:sp>
-        <p:nvSpPr>
-          <p:cNvPr id="44" name="Text 42"/>
-          <p:cNvSpPr/>
-          <p:nvPr/>
-        </p:nvSpPr>
-        <p:spPr>
-          <a:xfrm>
-            <a:off x="6742420" y="3447288"/>
-            <a:ext cx="1102766" cy="365760"/>
+            <a:endParaRPr lang="en-US" sz="1050" dirty="0"/>
+          </a:p>
+        </p:txBody>
+      </p:sp>
+      <p:sp>
+        <p:nvSpPr>
+          <p:cNvPr id="69" name="Text 67"/>
+          <p:cNvSpPr/>
+          <p:nvPr/>
+        </p:nvSpPr>
+        <p:spPr>
+          <a:xfrm>
+            <a:off x="6776681" y="4526280"/>
+            <a:ext cx="1070647" cy="306324"/>
           </a:xfrm>
           <a:prstGeom prst="rect">
             <a:avLst/>
@@ -24267,7 +25194,7 @@
               <a:buNone/>
             </a:pPr>
             <a:r>
-              <a:rPr lang="en-US" sz="1100" dirty="0">
+              <a:rPr lang="en-US" sz="1050" dirty="0">
                 <a:solidFill>
                   <a:srgbClr val="3D3D3D"/>
                 </a:solidFill>
@@ -24275,22 +25202,22 @@
                 <a:ea typeface="DIN Next Arabic" pitchFamily="34" charset="-122"/>
                 <a:cs typeface="DIN Next Arabic" pitchFamily="34" charset="-120"/>
               </a:rPr>
-              <a:t>٥٠٫٤٪</a:t>
-            </a:r>
-            <a:endParaRPr lang="en-US" sz="1100" dirty="0"/>
-          </a:p>
-        </p:txBody>
-      </p:sp>
-      <p:sp>
-        <p:nvSpPr>
-          <p:cNvPr id="45" name="Text 43"/>
-          <p:cNvSpPr/>
-          <p:nvPr/>
-        </p:nvSpPr>
-        <p:spPr>
-          <a:xfrm>
-            <a:off x="5639653" y="3447288"/>
-            <a:ext cx="1102766" cy="365760"/>
+              <a:t>٤٢٩</a:t>
+            </a:r>
+            <a:endParaRPr lang="en-US" sz="1050" dirty="0"/>
+          </a:p>
+        </p:txBody>
+      </p:sp>
+      <p:sp>
+        <p:nvSpPr>
+          <p:cNvPr id="70" name="Text 68"/>
+          <p:cNvSpPr/>
+          <p:nvPr/>
+        </p:nvSpPr>
+        <p:spPr>
+          <a:xfrm>
+            <a:off x="5706034" y="4526280"/>
+            <a:ext cx="1070647" cy="306324"/>
           </a:xfrm>
           <a:prstGeom prst="rect">
             <a:avLst/>
@@ -24306,7 +25233,7 @@
               <a:buNone/>
             </a:pPr>
             <a:r>
-              <a:rPr lang="en-US" sz="1100" dirty="0">
+              <a:rPr lang="en-US" sz="1050" dirty="0">
                 <a:solidFill>
                   <a:srgbClr val="3D3D3D"/>
                 </a:solidFill>
@@ -24314,22 +25241,61 @@
                 <a:ea typeface="DIN Next Arabic" pitchFamily="34" charset="-122"/>
                 <a:cs typeface="DIN Next Arabic" pitchFamily="34" charset="-120"/>
               </a:rPr>
+              <a:t>٤٣٦</a:t>
+            </a:r>
+            <a:endParaRPr lang="en-US" sz="1050" dirty="0"/>
+          </a:p>
+        </p:txBody>
+      </p:sp>
+      <p:sp>
+        <p:nvSpPr>
+          <p:cNvPr id="71" name="Text 69"/>
+          <p:cNvSpPr/>
+          <p:nvPr/>
+        </p:nvSpPr>
+        <p:spPr>
+          <a:xfrm>
+            <a:off x="4742451" y="4526280"/>
+            <a:ext cx="963582" cy="306324"/>
+          </a:xfrm>
+          <a:prstGeom prst="rect">
+            <a:avLst/>
+          </a:prstGeom>
+          <a:noFill/>
+          <a:ln/>
+        </p:spPr>
+        <p:txBody>
+          <a:bodyPr wrap="square" lIns="0" tIns="762" rIns="762" bIns="0" rtlCol="0" anchor="ctr"/>
+          <a:lstStyle/>
+          <a:p>
+            <a:pPr rtl="1" algn="ctr" indent="0" marL="0">
+              <a:buNone/>
+            </a:pPr>
+            <a:r>
+              <a:rPr lang="en-US" sz="1050" dirty="0">
+                <a:solidFill>
+                  <a:srgbClr val="3D3D3D"/>
+                </a:solidFill>
+                <a:latin typeface="DIN Next Arabic" pitchFamily="34" charset="0"/>
+                <a:ea typeface="DIN Next Arabic" pitchFamily="34" charset="-122"/>
+                <a:cs typeface="DIN Next Arabic" pitchFamily="34" charset="-120"/>
+              </a:rPr>
               <a:t>٢ / ٢</a:t>
             </a:r>
-            <a:endParaRPr lang="en-US" sz="1100" dirty="0"/>
-          </a:p>
-        </p:txBody>
-      </p:sp>
-      <p:sp>
-        <p:nvSpPr>
-          <p:cNvPr id="46" name="Text 44"/>
-          <p:cNvSpPr/>
-          <p:nvPr/>
-        </p:nvSpPr>
-        <p:spPr>
-          <a:xfrm>
-            <a:off x="4206057" y="3447288"/>
-            <a:ext cx="1433596" cy="365760"/>
+            <a:endParaRPr lang="en-US" sz="1050" dirty="0"/>
+          </a:p>
+        </p:txBody>
+      </p:sp>
+      <p:sp>
+        <p:nvSpPr>
+          <p:cNvPr id="72" name="Text 70"/>
+          <p:cNvSpPr/>
+          <p:nvPr/>
+        </p:nvSpPr>
+        <p:spPr>
+          <a:xfrm>
+            <a:off x="3671804" y="4526280"/>
+            <a:ext cx="1070647" cy="306324"/>
           </a:xfrm>
           <a:prstGeom prst="rect">
             <a:avLst/>
@@ -24345,7 +25311,7 @@
               <a:buNone/>
             </a:pPr>
             <a:r>
-              <a:rPr lang="en-US" sz="1100" b="1" dirty="0">
+              <a:rPr lang="en-US" sz="1050" b="1" dirty="0">
                 <a:solidFill>
                   <a:srgbClr val="3D3D3D"/>
                 </a:solidFill>
@@ -24355,20 +25321,20 @@
               </a:rPr>
               <a:t>٢١٤</a:t>
             </a:r>
-            <a:endParaRPr lang="en-US" sz="1100" dirty="0"/>
-          </a:p>
-        </p:txBody>
-      </p:sp>
-      <p:sp>
-        <p:nvSpPr>
-          <p:cNvPr id="47" name="Text 45"/>
-          <p:cNvSpPr/>
-          <p:nvPr/>
-        </p:nvSpPr>
-        <p:spPr>
-          <a:xfrm>
-            <a:off x="2772461" y="3447288"/>
-            <a:ext cx="1433596" cy="365760"/>
+            <a:endParaRPr lang="en-US" sz="1050" dirty="0"/>
+          </a:p>
+        </p:txBody>
+      </p:sp>
+      <p:sp>
+        <p:nvSpPr>
+          <p:cNvPr id="73" name="Text 71"/>
+          <p:cNvSpPr/>
+          <p:nvPr/>
+        </p:nvSpPr>
+        <p:spPr>
+          <a:xfrm>
+            <a:off x="2601157" y="4526280"/>
+            <a:ext cx="1070647" cy="306324"/>
           </a:xfrm>
           <a:prstGeom prst="rect">
             <a:avLst/>
@@ -24384,7 +25350,7 @@
               <a:buNone/>
             </a:pPr>
             <a:r>
-              <a:rPr lang="en-US" sz="1100" b="1" dirty="0">
+              <a:rPr lang="en-US" sz="1050" b="1" dirty="0">
                 <a:solidFill>
                   <a:srgbClr val="F5831F"/>
                 </a:solidFill>
@@ -24394,20 +25360,20 @@
               </a:rPr>
               <a:t>٢١٨</a:t>
             </a:r>
-            <a:endParaRPr lang="en-US" sz="1100" dirty="0"/>
-          </a:p>
-        </p:txBody>
-      </p:sp>
-      <p:sp>
-        <p:nvSpPr>
-          <p:cNvPr id="48" name="Text 46"/>
-          <p:cNvSpPr/>
-          <p:nvPr/>
-        </p:nvSpPr>
-        <p:spPr>
-          <a:xfrm>
-            <a:off x="1669694" y="3447288"/>
-            <a:ext cx="1102766" cy="365760"/>
+            <a:endParaRPr lang="en-US" sz="1050" dirty="0"/>
+          </a:p>
+        </p:txBody>
+      </p:sp>
+      <p:sp>
+        <p:nvSpPr>
+          <p:cNvPr id="74" name="Text 72"/>
+          <p:cNvSpPr/>
+          <p:nvPr/>
+        </p:nvSpPr>
+        <p:spPr>
+          <a:xfrm>
+            <a:off x="1744640" y="4526280"/>
+            <a:ext cx="856518" cy="306324"/>
           </a:xfrm>
           <a:prstGeom prst="rect">
             <a:avLst/>
@@ -24423,30 +25389,30 @@
               <a:buNone/>
             </a:pPr>
             <a:r>
-              <a:rPr lang="en-US" sz="1100" dirty="0">
-                <a:solidFill>
-                  <a:srgbClr val="3D3D3D"/>
-                </a:solidFill>
-                <a:latin typeface="DIN Next Arabic" pitchFamily="34" charset="0"/>
-                <a:ea typeface="DIN Next Arabic" pitchFamily="34" charset="-122"/>
-                <a:cs typeface="DIN Next Arabic" pitchFamily="34" charset="-120"/>
-              </a:rPr>
-              <a:t>٢١٫٠</a:t>
-            </a:r>
-            <a:endParaRPr lang="en-US" sz="1100" dirty="0"/>
-          </a:p>
-        </p:txBody>
-      </p:sp>
-      <p:sp>
-        <p:nvSpPr>
-          <p:cNvPr id="49" name="Text 47"/>
-          <p:cNvSpPr/>
-          <p:nvPr/>
-        </p:nvSpPr>
-        <p:spPr>
-          <a:xfrm>
-            <a:off x="566928" y="3447288"/>
-            <a:ext cx="1102766" cy="365760"/>
+              <a:rPr lang="en-US" sz="1050" dirty="0">
+                <a:solidFill>
+                  <a:srgbClr val="9A3E2C"/>
+                </a:solidFill>
+                <a:latin typeface="DIN Next Arabic" pitchFamily="34" charset="0"/>
+                <a:ea typeface="DIN Next Arabic" pitchFamily="34" charset="-122"/>
+                <a:cs typeface="DIN Next Arabic" pitchFamily="34" charset="-120"/>
+              </a:rPr>
+              <a:t>+٢٪</a:t>
+            </a:r>
+            <a:endParaRPr lang="en-US" sz="1050" dirty="0"/>
+          </a:p>
+        </p:txBody>
+      </p:sp>
+      <p:sp>
+        <p:nvSpPr>
+          <p:cNvPr id="75" name="Text 73"/>
+          <p:cNvSpPr/>
+          <p:nvPr/>
+        </p:nvSpPr>
+        <p:spPr>
+          <a:xfrm>
+            <a:off x="566928" y="4526280"/>
+            <a:ext cx="1177712" cy="306324"/>
           </a:xfrm>
           <a:prstGeom prst="rect">
             <a:avLst/>
@@ -24462,7 +25428,7 @@
               <a:buNone/>
             </a:pPr>
             <a:r>
-              <a:rPr lang="en-US" sz="1100" b="1" dirty="0">
+              <a:rPr lang="en-US" sz="1050" b="1" dirty="0">
                 <a:solidFill>
                   <a:srgbClr val="1F5E4A"/>
                 </a:solidFill>
@@ -24470,22 +25436,22 @@
                 <a:ea typeface="DIN Next Arabic" pitchFamily="34" charset="-122"/>
                 <a:cs typeface="DIN Next Arabic" pitchFamily="34" charset="-120"/>
               </a:rPr>
-              <a:t>٢٢٫٥</a:t>
-            </a:r>
-            <a:endParaRPr lang="en-US" sz="1100" dirty="0"/>
-          </a:p>
-        </p:txBody>
-      </p:sp>
-      <p:sp>
-        <p:nvSpPr>
-          <p:cNvPr id="50" name="Shape 48"/>
-          <p:cNvSpPr/>
-          <p:nvPr/>
-        </p:nvSpPr>
-        <p:spPr>
-          <a:xfrm>
-            <a:off x="566928" y="3813048"/>
-            <a:ext cx="11027664" cy="365760"/>
+              <a:t>١٠</a:t>
+            </a:r>
+            <a:endParaRPr lang="en-US" sz="1050" dirty="0"/>
+          </a:p>
+        </p:txBody>
+      </p:sp>
+      <p:sp>
+        <p:nvSpPr>
+          <p:cNvPr id="76" name="Shape 74"/>
+          <p:cNvSpPr/>
+          <p:nvPr/>
+        </p:nvSpPr>
+        <p:spPr>
+          <a:xfrm>
+            <a:off x="566928" y="4832604"/>
+            <a:ext cx="11027664" cy="306324"/>
           </a:xfrm>
           <a:prstGeom prst="rect">
             <a:avLst/>
@@ -24503,14 +25469,14 @@
       </p:sp>
       <p:sp>
         <p:nvSpPr>
-          <p:cNvPr id="51" name="Text 49"/>
-          <p:cNvSpPr/>
-          <p:nvPr/>
-        </p:nvSpPr>
-        <p:spPr>
-          <a:xfrm>
-            <a:off x="9830166" y="3813048"/>
-            <a:ext cx="1764426" cy="365760"/>
+          <p:cNvPr id="77" name="Text 75"/>
+          <p:cNvSpPr/>
+          <p:nvPr/>
+        </p:nvSpPr>
+        <p:spPr>
+          <a:xfrm>
+            <a:off x="9988622" y="4832604"/>
+            <a:ext cx="1605970" cy="306324"/>
           </a:xfrm>
           <a:prstGeom prst="rect">
             <a:avLst/>
@@ -24526,7 +25492,7 @@
               <a:buNone/>
             </a:pPr>
             <a:r>
-              <a:rPr lang="en-US" sz="1100" b="1" dirty="0">
+              <a:rPr lang="en-US" sz="1050" b="1" dirty="0">
                 <a:solidFill>
                   <a:srgbClr val="3D3D3D"/>
                 </a:solidFill>
@@ -24536,20 +25502,20 @@
               </a:rPr>
               <a:t>بن درويش</a:t>
             </a:r>
-            <a:endParaRPr lang="en-US" sz="1100" dirty="0"/>
-          </a:p>
-        </p:txBody>
-      </p:sp>
-      <p:sp>
-        <p:nvSpPr>
-          <p:cNvPr id="52" name="Text 50"/>
-          <p:cNvSpPr/>
-          <p:nvPr/>
-        </p:nvSpPr>
-        <p:spPr>
-          <a:xfrm>
-            <a:off x="8947953" y="3813048"/>
-            <a:ext cx="882213" cy="365760"/>
+            <a:endParaRPr lang="en-US" sz="1050" dirty="0"/>
+          </a:p>
+        </p:txBody>
+      </p:sp>
+      <p:sp>
+        <p:nvSpPr>
+          <p:cNvPr id="78" name="Text 76"/>
+          <p:cNvSpPr/>
+          <p:nvPr/>
+        </p:nvSpPr>
+        <p:spPr>
+          <a:xfrm>
+            <a:off x="9132104" y="4832604"/>
+            <a:ext cx="856518" cy="306324"/>
           </a:xfrm>
           <a:prstGeom prst="rect">
             <a:avLst/>
@@ -24565,7 +25531,7 @@
               <a:buNone/>
             </a:pPr>
             <a:r>
-              <a:rPr lang="en-US" sz="1100" dirty="0">
+              <a:rPr lang="en-US" sz="1050" dirty="0">
                 <a:solidFill>
                   <a:srgbClr val="3D3D3D"/>
                 </a:solidFill>
@@ -24575,20 +25541,20 @@
               </a:rPr>
               <a:t>MK023</a:t>
             </a:r>
-            <a:endParaRPr lang="en-US" sz="1100" dirty="0"/>
-          </a:p>
-        </p:txBody>
-      </p:sp>
-      <p:sp>
-        <p:nvSpPr>
-          <p:cNvPr id="53" name="Text 51"/>
-          <p:cNvSpPr/>
-          <p:nvPr/>
-        </p:nvSpPr>
-        <p:spPr>
-          <a:xfrm>
-            <a:off x="7845186" y="3813048"/>
-            <a:ext cx="1102766" cy="365760"/>
+            <a:endParaRPr lang="en-US" sz="1050" dirty="0"/>
+          </a:p>
+        </p:txBody>
+      </p:sp>
+      <p:sp>
+        <p:nvSpPr>
+          <p:cNvPr id="79" name="Text 77"/>
+          <p:cNvSpPr/>
+          <p:nvPr/>
+        </p:nvSpPr>
+        <p:spPr>
+          <a:xfrm>
+            <a:off x="7847328" y="4832604"/>
+            <a:ext cx="1284776" cy="306324"/>
           </a:xfrm>
           <a:prstGeom prst="rect">
             <a:avLst/>
@@ -24604,7 +25570,7 @@
               <a:buNone/>
             </a:pPr>
             <a:r>
-              <a:rPr lang="en-US" sz="1100" dirty="0">
+              <a:rPr lang="en-US" sz="1050" dirty="0">
                 <a:solidFill>
                   <a:srgbClr val="3D3D3D"/>
                 </a:solidFill>
@@ -24614,20 +25580,20 @@
               </a:rPr>
               <a:t>٧٩٠</a:t>
             </a:r>
-            <a:endParaRPr lang="en-US" sz="1100" dirty="0"/>
-          </a:p>
-        </p:txBody>
-      </p:sp>
-      <p:sp>
-        <p:nvSpPr>
-          <p:cNvPr id="54" name="Text 52"/>
-          <p:cNvSpPr/>
-          <p:nvPr/>
-        </p:nvSpPr>
-        <p:spPr>
-          <a:xfrm>
-            <a:off x="6742420" y="3813048"/>
-            <a:ext cx="1102766" cy="365760"/>
+            <a:endParaRPr lang="en-US" sz="1050" dirty="0"/>
+          </a:p>
+        </p:txBody>
+      </p:sp>
+      <p:sp>
+        <p:nvSpPr>
+          <p:cNvPr id="80" name="Text 78"/>
+          <p:cNvSpPr/>
+          <p:nvPr/>
+        </p:nvSpPr>
+        <p:spPr>
+          <a:xfrm>
+            <a:off x="6776681" y="4832604"/>
+            <a:ext cx="1070647" cy="306324"/>
           </a:xfrm>
           <a:prstGeom prst="rect">
             <a:avLst/>
@@ -24643,7 +25609,7 @@
               <a:buNone/>
             </a:pPr>
             <a:r>
-              <a:rPr lang="en-US" sz="1100" dirty="0">
+              <a:rPr lang="en-US" sz="1050" dirty="0">
                 <a:solidFill>
                   <a:srgbClr val="3D3D3D"/>
                 </a:solidFill>
@@ -24651,22 +25617,22 @@
                 <a:ea typeface="DIN Next Arabic" pitchFamily="34" charset="-122"/>
                 <a:cs typeface="DIN Next Arabic" pitchFamily="34" charset="-120"/>
               </a:rPr>
-              <a:t>٥٤٫٩٪</a:t>
-            </a:r>
-            <a:endParaRPr lang="en-US" sz="1100" dirty="0"/>
-          </a:p>
-        </p:txBody>
-      </p:sp>
-      <p:sp>
-        <p:nvSpPr>
-          <p:cNvPr id="55" name="Text 53"/>
-          <p:cNvSpPr/>
-          <p:nvPr/>
-        </p:nvSpPr>
-        <p:spPr>
-          <a:xfrm>
-            <a:off x="5639653" y="3813048"/>
-            <a:ext cx="1102766" cy="365760"/>
+              <a:t>٣٥٧</a:t>
+            </a:r>
+            <a:endParaRPr lang="en-US" sz="1050" dirty="0"/>
+          </a:p>
+        </p:txBody>
+      </p:sp>
+      <p:sp>
+        <p:nvSpPr>
+          <p:cNvPr id="81" name="Text 79"/>
+          <p:cNvSpPr/>
+          <p:nvPr/>
+        </p:nvSpPr>
+        <p:spPr>
+          <a:xfrm>
+            <a:off x="5706034" y="4832604"/>
+            <a:ext cx="1070647" cy="306324"/>
           </a:xfrm>
           <a:prstGeom prst="rect">
             <a:avLst/>
@@ -24682,7 +25648,7 @@
               <a:buNone/>
             </a:pPr>
             <a:r>
-              <a:rPr lang="en-US" sz="1100" dirty="0">
+              <a:rPr lang="en-US" sz="1050" dirty="0">
                 <a:solidFill>
                   <a:srgbClr val="3D3D3D"/>
                 </a:solidFill>
@@ -24690,22 +25656,61 @@
                 <a:ea typeface="DIN Next Arabic" pitchFamily="34" charset="-122"/>
                 <a:cs typeface="DIN Next Arabic" pitchFamily="34" charset="-120"/>
               </a:rPr>
+              <a:t>٤٣٤</a:t>
+            </a:r>
+            <a:endParaRPr lang="en-US" sz="1050" dirty="0"/>
+          </a:p>
+        </p:txBody>
+      </p:sp>
+      <p:sp>
+        <p:nvSpPr>
+          <p:cNvPr id="82" name="Text 80"/>
+          <p:cNvSpPr/>
+          <p:nvPr/>
+        </p:nvSpPr>
+        <p:spPr>
+          <a:xfrm>
+            <a:off x="4742451" y="4832604"/>
+            <a:ext cx="963582" cy="306324"/>
+          </a:xfrm>
+          <a:prstGeom prst="rect">
+            <a:avLst/>
+          </a:prstGeom>
+          <a:noFill/>
+          <a:ln/>
+        </p:spPr>
+        <p:txBody>
+          <a:bodyPr wrap="square" lIns="0" tIns="762" rIns="762" bIns="0" rtlCol="0" anchor="ctr"/>
+          <a:lstStyle/>
+          <a:p>
+            <a:pPr rtl="1" algn="ctr" indent="0" marL="0">
+              <a:buNone/>
+            </a:pPr>
+            <a:r>
+              <a:rPr lang="en-US" sz="1050" dirty="0">
+                <a:solidFill>
+                  <a:srgbClr val="3D3D3D"/>
+                </a:solidFill>
+                <a:latin typeface="DIN Next Arabic" pitchFamily="34" charset="0"/>
+                <a:ea typeface="DIN Next Arabic" pitchFamily="34" charset="-122"/>
+                <a:cs typeface="DIN Next Arabic" pitchFamily="34" charset="-120"/>
+              </a:rPr>
               <a:t>٢ / ٢</a:t>
             </a:r>
-            <a:endParaRPr lang="en-US" sz="1100" dirty="0"/>
-          </a:p>
-        </p:txBody>
-      </p:sp>
-      <p:sp>
-        <p:nvSpPr>
-          <p:cNvPr id="56" name="Text 54"/>
-          <p:cNvSpPr/>
-          <p:nvPr/>
-        </p:nvSpPr>
-        <p:spPr>
-          <a:xfrm>
-            <a:off x="4206057" y="3813048"/>
-            <a:ext cx="1433596" cy="365760"/>
+            <a:endParaRPr lang="en-US" sz="1050" dirty="0"/>
+          </a:p>
+        </p:txBody>
+      </p:sp>
+      <p:sp>
+        <p:nvSpPr>
+          <p:cNvPr id="83" name="Text 81"/>
+          <p:cNvSpPr/>
+          <p:nvPr/>
+        </p:nvSpPr>
+        <p:spPr>
+          <a:xfrm>
+            <a:off x="3671804" y="4832604"/>
+            <a:ext cx="1070647" cy="306324"/>
           </a:xfrm>
           <a:prstGeom prst="rect">
             <a:avLst/>
@@ -24721,7 +25726,7 @@
               <a:buNone/>
             </a:pPr>
             <a:r>
-              <a:rPr lang="en-US" sz="1100" b="1" dirty="0">
+              <a:rPr lang="en-US" sz="1050" b="1" dirty="0">
                 <a:solidFill>
                   <a:srgbClr val="3D3D3D"/>
                 </a:solidFill>
@@ -24731,20 +25736,20 @@
               </a:rPr>
               <a:t>١٧٨</a:t>
             </a:r>
-            <a:endParaRPr lang="en-US" sz="1100" dirty="0"/>
-          </a:p>
-        </p:txBody>
-      </p:sp>
-      <p:sp>
-        <p:nvSpPr>
-          <p:cNvPr id="57" name="Text 55"/>
-          <p:cNvSpPr/>
-          <p:nvPr/>
-        </p:nvSpPr>
-        <p:spPr>
-          <a:xfrm>
-            <a:off x="2772461" y="3813048"/>
-            <a:ext cx="1433596" cy="365760"/>
+            <a:endParaRPr lang="en-US" sz="1050" dirty="0"/>
+          </a:p>
+        </p:txBody>
+      </p:sp>
+      <p:sp>
+        <p:nvSpPr>
+          <p:cNvPr id="84" name="Text 82"/>
+          <p:cNvSpPr/>
+          <p:nvPr/>
+        </p:nvSpPr>
+        <p:spPr>
+          <a:xfrm>
+            <a:off x="2601157" y="4832604"/>
+            <a:ext cx="1070647" cy="306324"/>
           </a:xfrm>
           <a:prstGeom prst="rect">
             <a:avLst/>
@@ -24760,7 +25765,7 @@
               <a:buNone/>
             </a:pPr>
             <a:r>
-              <a:rPr lang="en-US" sz="1100" b="1" dirty="0">
+              <a:rPr lang="en-US" sz="1050" b="1" dirty="0">
                 <a:solidFill>
                   <a:srgbClr val="F5831F"/>
                 </a:solidFill>
@@ -24770,20 +25775,20 @@
               </a:rPr>
               <a:t>٢١٧</a:t>
             </a:r>
-            <a:endParaRPr lang="en-US" sz="1100" dirty="0"/>
-          </a:p>
-        </p:txBody>
-      </p:sp>
-      <p:sp>
-        <p:nvSpPr>
-          <p:cNvPr id="58" name="Text 56"/>
-          <p:cNvSpPr/>
-          <p:nvPr/>
-        </p:nvSpPr>
-        <p:spPr>
-          <a:xfrm>
-            <a:off x="1669694" y="3813048"/>
-            <a:ext cx="1102766" cy="365760"/>
+            <a:endParaRPr lang="en-US" sz="1050" dirty="0"/>
+          </a:p>
+        </p:txBody>
+      </p:sp>
+      <p:sp>
+        <p:nvSpPr>
+          <p:cNvPr id="85" name="Text 83"/>
+          <p:cNvSpPr/>
+          <p:nvPr/>
+        </p:nvSpPr>
+        <p:spPr>
+          <a:xfrm>
+            <a:off x="1744640" y="4832604"/>
+            <a:ext cx="856518" cy="306324"/>
           </a:xfrm>
           <a:prstGeom prst="rect">
             <a:avLst/>
@@ -24799,30 +25804,30 @@
               <a:buNone/>
             </a:pPr>
             <a:r>
-              <a:rPr lang="en-US" sz="1100" dirty="0">
-                <a:solidFill>
-                  <a:srgbClr val="3D3D3D"/>
-                </a:solidFill>
-                <a:latin typeface="DIN Next Arabic" pitchFamily="34" charset="0"/>
-                <a:ea typeface="DIN Next Arabic" pitchFamily="34" charset="-122"/>
-                <a:cs typeface="DIN Next Arabic" pitchFamily="34" charset="-120"/>
-              </a:rPr>
-              <a:t>٢٠٫٠</a:t>
-            </a:r>
-            <a:endParaRPr lang="en-US" sz="1100" dirty="0"/>
-          </a:p>
-        </p:txBody>
-      </p:sp>
-      <p:sp>
-        <p:nvSpPr>
-          <p:cNvPr id="59" name="Text 57"/>
-          <p:cNvSpPr/>
-          <p:nvPr/>
-        </p:nvSpPr>
-        <p:spPr>
-          <a:xfrm>
-            <a:off x="566928" y="3813048"/>
-            <a:ext cx="1102766" cy="365760"/>
+              <a:rPr lang="en-US" sz="1050" dirty="0">
+                <a:solidFill>
+                  <a:srgbClr val="9A3E2C"/>
+                </a:solidFill>
+                <a:latin typeface="DIN Next Arabic" pitchFamily="34" charset="0"/>
+                <a:ea typeface="DIN Next Arabic" pitchFamily="34" charset="-122"/>
+                <a:cs typeface="DIN Next Arabic" pitchFamily="34" charset="-120"/>
+              </a:rPr>
+              <a:t>+٢٢٪</a:t>
+            </a:r>
+            <a:endParaRPr lang="en-US" sz="1050" dirty="0"/>
+          </a:p>
+        </p:txBody>
+      </p:sp>
+      <p:sp>
+        <p:nvSpPr>
+          <p:cNvPr id="86" name="Text 84"/>
+          <p:cNvSpPr/>
+          <p:nvPr/>
+        </p:nvSpPr>
+        <p:spPr>
+          <a:xfrm>
+            <a:off x="566928" y="4832604"/>
+            <a:ext cx="1177712" cy="306324"/>
           </a:xfrm>
           <a:prstGeom prst="rect">
             <a:avLst/>
@@ -24838,7 +25843,7 @@
               <a:buNone/>
             </a:pPr>
             <a:r>
-              <a:rPr lang="en-US" sz="1100" b="1" dirty="0">
+              <a:rPr lang="en-US" sz="1050" b="1" dirty="0">
                 <a:solidFill>
                   <a:srgbClr val="1F5E4A"/>
                 </a:solidFill>
@@ -24846,22 +25851,22 @@
                 <a:ea typeface="DIN Next Arabic" pitchFamily="34" charset="-122"/>
                 <a:cs typeface="DIN Next Arabic" pitchFamily="34" charset="-120"/>
               </a:rPr>
-              <a:t>٢١٫٩</a:t>
-            </a:r>
-            <a:endParaRPr lang="en-US" sz="1100" dirty="0"/>
-          </a:p>
-        </p:txBody>
-      </p:sp>
-      <p:sp>
-        <p:nvSpPr>
-          <p:cNvPr id="60" name="Shape 58"/>
-          <p:cNvSpPr/>
-          <p:nvPr/>
-        </p:nvSpPr>
-        <p:spPr>
-          <a:xfrm>
-            <a:off x="566928" y="4178808"/>
-            <a:ext cx="11027664" cy="365760"/>
+              <a:t>٠</a:t>
+            </a:r>
+            <a:endParaRPr lang="en-US" sz="1050" dirty="0"/>
+          </a:p>
+        </p:txBody>
+      </p:sp>
+      <p:sp>
+        <p:nvSpPr>
+          <p:cNvPr id="87" name="Shape 85"/>
+          <p:cNvSpPr/>
+          <p:nvPr/>
+        </p:nvSpPr>
+        <p:spPr>
+          <a:xfrm>
+            <a:off x="566928" y="5138928"/>
+            <a:ext cx="11027664" cy="306324"/>
           </a:xfrm>
           <a:prstGeom prst="rect">
             <a:avLst/>
@@ -24879,14 +25884,14 @@
       </p:sp>
       <p:sp>
         <p:nvSpPr>
-          <p:cNvPr id="61" name="Text 59"/>
-          <p:cNvSpPr/>
-          <p:nvPr/>
-        </p:nvSpPr>
-        <p:spPr>
-          <a:xfrm>
-            <a:off x="9830166" y="4178808"/>
-            <a:ext cx="1764426" cy="365760"/>
+          <p:cNvPr id="88" name="Text 86"/>
+          <p:cNvSpPr/>
+          <p:nvPr/>
+        </p:nvSpPr>
+        <p:spPr>
+          <a:xfrm>
+            <a:off x="9988622" y="5138928"/>
+            <a:ext cx="1605970" cy="306324"/>
           </a:xfrm>
           <a:prstGeom prst="rect">
             <a:avLst/>
@@ -24902,7 +25907,7 @@
               <a:buNone/>
             </a:pPr>
             <a:r>
-              <a:rPr lang="en-US" sz="1100" b="1" dirty="0">
+              <a:rPr lang="en-US" sz="1050" b="1" dirty="0">
                 <a:solidFill>
                   <a:srgbClr val="3D3D3D"/>
                 </a:solidFill>
@@ -24912,20 +25917,20 @@
               </a:rPr>
               <a:t>الشرايع</a:t>
             </a:r>
-            <a:endParaRPr lang="en-US" sz="1100" dirty="0"/>
-          </a:p>
-        </p:txBody>
-      </p:sp>
-      <p:sp>
-        <p:nvSpPr>
-          <p:cNvPr id="62" name="Text 60"/>
-          <p:cNvSpPr/>
-          <p:nvPr/>
-        </p:nvSpPr>
-        <p:spPr>
-          <a:xfrm>
-            <a:off x="8947953" y="4178808"/>
-            <a:ext cx="882213" cy="365760"/>
+            <a:endParaRPr lang="en-US" sz="1050" dirty="0"/>
+          </a:p>
+        </p:txBody>
+      </p:sp>
+      <p:sp>
+        <p:nvSpPr>
+          <p:cNvPr id="89" name="Text 87"/>
+          <p:cNvSpPr/>
+          <p:nvPr/>
+        </p:nvSpPr>
+        <p:spPr>
+          <a:xfrm>
+            <a:off x="9132104" y="5138928"/>
+            <a:ext cx="856518" cy="306324"/>
           </a:xfrm>
           <a:prstGeom prst="rect">
             <a:avLst/>
@@ -24941,7 +25946,7 @@
               <a:buNone/>
             </a:pPr>
             <a:r>
-              <a:rPr lang="en-US" sz="1100" dirty="0">
+              <a:rPr lang="en-US" sz="1050" dirty="0">
                 <a:solidFill>
                   <a:srgbClr val="3D3D3D"/>
                 </a:solidFill>
@@ -24951,20 +25956,20 @@
               </a:rPr>
               <a:t>MK019</a:t>
             </a:r>
-            <a:endParaRPr lang="en-US" sz="1100" dirty="0"/>
-          </a:p>
-        </p:txBody>
-      </p:sp>
-      <p:sp>
-        <p:nvSpPr>
-          <p:cNvPr id="63" name="Text 61"/>
-          <p:cNvSpPr/>
-          <p:nvPr/>
-        </p:nvSpPr>
-        <p:spPr>
-          <a:xfrm>
-            <a:off x="7845186" y="4178808"/>
-            <a:ext cx="1102766" cy="365760"/>
+            <a:endParaRPr lang="en-US" sz="1050" dirty="0"/>
+          </a:p>
+        </p:txBody>
+      </p:sp>
+      <p:sp>
+        <p:nvSpPr>
+          <p:cNvPr id="90" name="Text 88"/>
+          <p:cNvSpPr/>
+          <p:nvPr/>
+        </p:nvSpPr>
+        <p:spPr>
+          <a:xfrm>
+            <a:off x="7847328" y="5138928"/>
+            <a:ext cx="1284776" cy="306324"/>
           </a:xfrm>
           <a:prstGeom prst="rect">
             <a:avLst/>
@@ -24980,7 +25985,7 @@
               <a:buNone/>
             </a:pPr>
             <a:r>
-              <a:rPr lang="en-US" sz="1100" dirty="0">
+              <a:rPr lang="en-US" sz="1050" dirty="0">
                 <a:solidFill>
                   <a:srgbClr val="3D3D3D"/>
                 </a:solidFill>
@@ -24990,20 +25995,20 @@
               </a:rPr>
               <a:t>٤٤٣</a:t>
             </a:r>
-            <a:endParaRPr lang="en-US" sz="1100" dirty="0"/>
-          </a:p>
-        </p:txBody>
-      </p:sp>
-      <p:sp>
-        <p:nvSpPr>
-          <p:cNvPr id="64" name="Text 62"/>
-          <p:cNvSpPr/>
-          <p:nvPr/>
-        </p:nvSpPr>
-        <p:spPr>
-          <a:xfrm>
-            <a:off x="6742420" y="4178808"/>
-            <a:ext cx="1102766" cy="365760"/>
+            <a:endParaRPr lang="en-US" sz="1050" dirty="0"/>
+          </a:p>
+        </p:txBody>
+      </p:sp>
+      <p:sp>
+        <p:nvSpPr>
+          <p:cNvPr id="91" name="Text 89"/>
+          <p:cNvSpPr/>
+          <p:nvPr/>
+        </p:nvSpPr>
+        <p:spPr>
+          <a:xfrm>
+            <a:off x="6776681" y="5138928"/>
+            <a:ext cx="1070647" cy="306324"/>
           </a:xfrm>
           <a:prstGeom prst="rect">
             <a:avLst/>
@@ -25019,7 +26024,7 @@
               <a:buNone/>
             </a:pPr>
             <a:r>
-              <a:rPr lang="en-US" sz="1100" dirty="0">
+              <a:rPr lang="en-US" sz="1050" dirty="0">
                 <a:solidFill>
                   <a:srgbClr val="3D3D3D"/>
                 </a:solidFill>
@@ -25027,22 +26032,22 @@
                 <a:ea typeface="DIN Next Arabic" pitchFamily="34" charset="-122"/>
                 <a:cs typeface="DIN Next Arabic" pitchFamily="34" charset="-120"/>
               </a:rPr>
-              <a:t>٥٦٫١٪</a:t>
-            </a:r>
-            <a:endParaRPr lang="en-US" sz="1100" dirty="0"/>
-          </a:p>
-        </p:txBody>
-      </p:sp>
-      <p:sp>
-        <p:nvSpPr>
-          <p:cNvPr id="65" name="Text 63"/>
-          <p:cNvSpPr/>
-          <p:nvPr/>
-        </p:nvSpPr>
-        <p:spPr>
-          <a:xfrm>
-            <a:off x="5639653" y="4178808"/>
-            <a:ext cx="1102766" cy="365760"/>
+              <a:t>١٩٤</a:t>
+            </a:r>
+            <a:endParaRPr lang="en-US" sz="1050" dirty="0"/>
+          </a:p>
+        </p:txBody>
+      </p:sp>
+      <p:sp>
+        <p:nvSpPr>
+          <p:cNvPr id="92" name="Text 90"/>
+          <p:cNvSpPr/>
+          <p:nvPr/>
+        </p:nvSpPr>
+        <p:spPr>
+          <a:xfrm>
+            <a:off x="5706034" y="5138928"/>
+            <a:ext cx="1070647" cy="306324"/>
           </a:xfrm>
           <a:prstGeom prst="rect">
             <a:avLst/>
@@ -25058,7 +26063,7 @@
               <a:buNone/>
             </a:pPr>
             <a:r>
-              <a:rPr lang="en-US" sz="1100" dirty="0">
+              <a:rPr lang="en-US" sz="1050" dirty="0">
                 <a:solidFill>
                   <a:srgbClr val="3D3D3D"/>
                 </a:solidFill>
@@ -25066,22 +26071,61 @@
                 <a:ea typeface="DIN Next Arabic" pitchFamily="34" charset="-122"/>
                 <a:cs typeface="DIN Next Arabic" pitchFamily="34" charset="-120"/>
               </a:rPr>
+              <a:t>٢٤٨</a:t>
+            </a:r>
+            <a:endParaRPr lang="en-US" sz="1050" dirty="0"/>
+          </a:p>
+        </p:txBody>
+      </p:sp>
+      <p:sp>
+        <p:nvSpPr>
+          <p:cNvPr id="93" name="Text 91"/>
+          <p:cNvSpPr/>
+          <p:nvPr/>
+        </p:nvSpPr>
+        <p:spPr>
+          <a:xfrm>
+            <a:off x="4742451" y="5138928"/>
+            <a:ext cx="963582" cy="306324"/>
+          </a:xfrm>
+          <a:prstGeom prst="rect">
+            <a:avLst/>
+          </a:prstGeom>
+          <a:noFill/>
+          <a:ln/>
+        </p:spPr>
+        <p:txBody>
+          <a:bodyPr wrap="square" lIns="0" tIns="762" rIns="762" bIns="0" rtlCol="0" anchor="ctr"/>
+          <a:lstStyle/>
+          <a:p>
+            <a:pPr rtl="1" algn="ctr" indent="0" marL="0">
+              <a:buNone/>
+            </a:pPr>
+            <a:r>
+              <a:rPr lang="en-US" sz="1050" dirty="0">
+                <a:solidFill>
+                  <a:srgbClr val="3D3D3D"/>
+                </a:solidFill>
+                <a:latin typeface="DIN Next Arabic" pitchFamily="34" charset="0"/>
+                <a:ea typeface="DIN Next Arabic" pitchFamily="34" charset="-122"/>
+                <a:cs typeface="DIN Next Arabic" pitchFamily="34" charset="-120"/>
+              </a:rPr>
               <a:t>٢ / ٢</a:t>
             </a:r>
-            <a:endParaRPr lang="en-US" sz="1100" dirty="0"/>
-          </a:p>
-        </p:txBody>
-      </p:sp>
-      <p:sp>
-        <p:nvSpPr>
-          <p:cNvPr id="66" name="Text 64"/>
-          <p:cNvSpPr/>
-          <p:nvPr/>
-        </p:nvSpPr>
-        <p:spPr>
-          <a:xfrm>
-            <a:off x="4206057" y="4178808"/>
-            <a:ext cx="1433596" cy="365760"/>
+            <a:endParaRPr lang="en-US" sz="1050" dirty="0"/>
+          </a:p>
+        </p:txBody>
+      </p:sp>
+      <p:sp>
+        <p:nvSpPr>
+          <p:cNvPr id="94" name="Text 92"/>
+          <p:cNvSpPr/>
+          <p:nvPr/>
+        </p:nvSpPr>
+        <p:spPr>
+          <a:xfrm>
+            <a:off x="3671804" y="5138928"/>
+            <a:ext cx="1070647" cy="306324"/>
           </a:xfrm>
           <a:prstGeom prst="rect">
             <a:avLst/>
@@ -25097,7 +26141,7 @@
               <a:buNone/>
             </a:pPr>
             <a:r>
-              <a:rPr lang="en-US" sz="1100" b="1" dirty="0">
+              <a:rPr lang="en-US" sz="1050" b="1" dirty="0">
                 <a:solidFill>
                   <a:srgbClr val="3D3D3D"/>
                 </a:solidFill>
@@ -25107,20 +26151,20 @@
               </a:rPr>
               <a:t>٩٧</a:t>
             </a:r>
-            <a:endParaRPr lang="en-US" sz="1100" dirty="0"/>
-          </a:p>
-        </p:txBody>
-      </p:sp>
-      <p:sp>
-        <p:nvSpPr>
-          <p:cNvPr id="67" name="Text 65"/>
-          <p:cNvSpPr/>
-          <p:nvPr/>
-        </p:nvSpPr>
-        <p:spPr>
-          <a:xfrm>
-            <a:off x="2772461" y="4178808"/>
-            <a:ext cx="1433596" cy="365760"/>
+            <a:endParaRPr lang="en-US" sz="1050" dirty="0"/>
+          </a:p>
+        </p:txBody>
+      </p:sp>
+      <p:sp>
+        <p:nvSpPr>
+          <p:cNvPr id="95" name="Text 93"/>
+          <p:cNvSpPr/>
+          <p:nvPr/>
+        </p:nvSpPr>
+        <p:spPr>
+          <a:xfrm>
+            <a:off x="2601157" y="5138928"/>
+            <a:ext cx="1070647" cy="306324"/>
           </a:xfrm>
           <a:prstGeom prst="rect">
             <a:avLst/>
@@ -25136,7 +26180,7 @@
               <a:buNone/>
             </a:pPr>
             <a:r>
-              <a:rPr lang="en-US" sz="1100" b="1" dirty="0">
+              <a:rPr lang="en-US" sz="1050" b="1" dirty="0">
                 <a:solidFill>
                   <a:srgbClr val="F5831F"/>
                 </a:solidFill>
@@ -25146,20 +26190,20 @@
               </a:rPr>
               <a:t>١٢٤</a:t>
             </a:r>
-            <a:endParaRPr lang="en-US" sz="1100" dirty="0"/>
-          </a:p>
-        </p:txBody>
-      </p:sp>
-      <p:sp>
-        <p:nvSpPr>
-          <p:cNvPr id="68" name="Text 66"/>
-          <p:cNvSpPr/>
-          <p:nvPr/>
-        </p:nvSpPr>
-        <p:spPr>
-          <a:xfrm>
-            <a:off x="1669694" y="4178808"/>
-            <a:ext cx="1102766" cy="365760"/>
+            <a:endParaRPr lang="en-US" sz="1050" dirty="0"/>
+          </a:p>
+        </p:txBody>
+      </p:sp>
+      <p:sp>
+        <p:nvSpPr>
+          <p:cNvPr id="96" name="Text 94"/>
+          <p:cNvSpPr/>
+          <p:nvPr/>
+        </p:nvSpPr>
+        <p:spPr>
+          <a:xfrm>
+            <a:off x="1744640" y="5138928"/>
+            <a:ext cx="856518" cy="306324"/>
           </a:xfrm>
           <a:prstGeom prst="rect">
             <a:avLst/>
@@ -25175,30 +26219,30 @@
               <a:buNone/>
             </a:pPr>
             <a:r>
-              <a:rPr lang="en-US" sz="1100" dirty="0">
-                <a:solidFill>
-                  <a:srgbClr val="3D3D3D"/>
-                </a:solidFill>
-                <a:latin typeface="DIN Next Arabic" pitchFamily="34" charset="0"/>
-                <a:ea typeface="DIN Next Arabic" pitchFamily="34" charset="-122"/>
-                <a:cs typeface="DIN Next Arabic" pitchFamily="34" charset="-120"/>
-              </a:rPr>
-              <a:t>٢٣٫٢</a:t>
-            </a:r>
-            <a:endParaRPr lang="en-US" sz="1100" dirty="0"/>
-          </a:p>
-        </p:txBody>
-      </p:sp>
-      <p:sp>
-        <p:nvSpPr>
-          <p:cNvPr id="69" name="Text 67"/>
-          <p:cNvSpPr/>
-          <p:nvPr/>
-        </p:nvSpPr>
-        <p:spPr>
-          <a:xfrm>
-            <a:off x="566928" y="4178808"/>
-            <a:ext cx="1102766" cy="365760"/>
+              <a:rPr lang="en-US" sz="1050" dirty="0">
+                <a:solidFill>
+                  <a:srgbClr val="9A3E2C"/>
+                </a:solidFill>
+                <a:latin typeface="DIN Next Arabic" pitchFamily="34" charset="0"/>
+                <a:ea typeface="DIN Next Arabic" pitchFamily="34" charset="-122"/>
+                <a:cs typeface="DIN Next Arabic" pitchFamily="34" charset="-120"/>
+              </a:rPr>
+              <a:t>+٢٨٪</a:t>
+            </a:r>
+            <a:endParaRPr lang="en-US" sz="1050" dirty="0"/>
+          </a:p>
+        </p:txBody>
+      </p:sp>
+      <p:sp>
+        <p:nvSpPr>
+          <p:cNvPr id="97" name="Text 95"/>
+          <p:cNvSpPr/>
+          <p:nvPr/>
+        </p:nvSpPr>
+        <p:spPr>
+          <a:xfrm>
+            <a:off x="566928" y="5138928"/>
+            <a:ext cx="1177712" cy="306324"/>
           </a:xfrm>
           <a:prstGeom prst="rect">
             <a:avLst/>
@@ -25214,7 +26258,7 @@
               <a:buNone/>
             </a:pPr>
             <a:r>
-              <a:rPr lang="en-US" sz="1100" b="1" dirty="0">
+              <a:rPr lang="en-US" sz="1050" b="1" dirty="0">
                 <a:solidFill>
                   <a:srgbClr val="1F5E4A"/>
                 </a:solidFill>
@@ -25222,112 +26266,34 @@
                 <a:ea typeface="DIN Next Arabic" pitchFamily="34" charset="-122"/>
                 <a:cs typeface="DIN Next Arabic" pitchFamily="34" charset="-120"/>
               </a:rPr>
-              <a:t>٢٣٫٨</a:t>
-            </a:r>
-            <a:endParaRPr lang="en-US" sz="1100" dirty="0"/>
-          </a:p>
-        </p:txBody>
-      </p:sp>
-      <p:sp>
-        <p:nvSpPr>
-          <p:cNvPr id="70" name="Text 68"/>
-          <p:cNvSpPr/>
-          <p:nvPr/>
-        </p:nvSpPr>
-        <p:spPr>
-          <a:xfrm>
-            <a:off x="566928" y="2057400"/>
-            <a:ext cx="11027664" cy="256032"/>
-          </a:xfrm>
-          <a:prstGeom prst="rect">
-            <a:avLst/>
-          </a:prstGeom>
-          <a:noFill/>
-          <a:ln/>
-        </p:spPr>
-        <p:txBody>
-          <a:bodyPr wrap="square" rtlCol="0" anchor="ctr"/>
-          <a:lstStyle/>
-          <a:p>
-            <a:pPr rtl="1" algn="r" indent="0" marL="0">
-              <a:buNone/>
-            </a:pPr>
-            <a:r>
-              <a:rPr lang="en-US" sz="1100" dirty="0">
-                <a:solidFill>
-                  <a:srgbClr val="6E6A64"/>
-                </a:solidFill>
-                <a:latin typeface="DIN Next Arabic" pitchFamily="34" charset="0"/>
-                <a:ea typeface="DIN Next Arabic" pitchFamily="34" charset="-122"/>
-                <a:cs typeface="DIN Next Arabic" pitchFamily="34" charset="-120"/>
-              </a:rPr>
-              <a:t>زيارات الوردية لكل عامل · والسلة المستهدفة من معيار الشريحة</a:t>
-            </a:r>
-            <a:endParaRPr lang="en-US" sz="1100" dirty="0"/>
-          </a:p>
-        </p:txBody>
-      </p:sp>
-      <p:sp>
-        <p:nvSpPr>
-          <p:cNvPr id="71" name="Text 69"/>
-          <p:cNvSpPr/>
-          <p:nvPr/>
-        </p:nvSpPr>
-        <p:spPr>
-          <a:xfrm>
-            <a:off x="566928" y="4617720"/>
-            <a:ext cx="11027664" cy="310896"/>
-          </a:xfrm>
-          <a:prstGeom prst="rect">
-            <a:avLst/>
-          </a:prstGeom>
-          <a:noFill/>
-          <a:ln/>
-        </p:spPr>
-        <p:txBody>
-          <a:bodyPr wrap="square" rtlCol="0" anchor="ctr"/>
-          <a:lstStyle/>
-          <a:p>
-            <a:pPr rtl="1" algn="r" indent="0" marL="0">
-              <a:buNone/>
-            </a:pPr>
-            <a:r>
-              <a:rPr lang="en-US" sz="1500" b="1" dirty="0">
-                <a:solidFill>
-                  <a:srgbClr val="F5831F"/>
-                </a:solidFill>
-                <a:latin typeface="DIN Next Arabic" pitchFamily="34" charset="0"/>
-                <a:ea typeface="DIN Next Arabic" pitchFamily="34" charset="-122"/>
-                <a:cs typeface="DIN Next Arabic" pitchFamily="34" charset="-120"/>
-              </a:rPr>
-              <a:t>مؤشرات العامل الخمسة</a:t>
-            </a:r>
-            <a:endParaRPr lang="en-US" sz="1500" dirty="0"/>
-          </a:p>
-        </p:txBody>
-      </p:sp>
-      <p:sp>
-        <p:nvSpPr>
-          <p:cNvPr id="72" name="Shape 70"/>
-          <p:cNvSpPr/>
-          <p:nvPr/>
-        </p:nvSpPr>
-        <p:spPr>
-          <a:xfrm>
-            <a:off x="9506102" y="4956048"/>
-            <a:ext cx="2088490" cy="960120"/>
+              <a:t>٢</a:t>
+            </a:r>
+            <a:endParaRPr lang="en-US" sz="1050" dirty="0"/>
+          </a:p>
+        </p:txBody>
+      </p:sp>
+      <p:sp>
+        <p:nvSpPr>
+          <p:cNvPr id="98" name="Shape 96"/>
+          <p:cNvSpPr/>
+          <p:nvPr/>
+        </p:nvSpPr>
+        <p:spPr>
+          <a:xfrm>
+            <a:off x="8040624" y="5541264"/>
+            <a:ext cx="3553968" cy="804672"/>
           </a:xfrm>
           <a:prstGeom prst="roundRect">
             <a:avLst>
-              <a:gd name="adj" fmla="val 3810"/>
+              <a:gd name="adj" fmla="val 5682"/>
             </a:avLst>
           </a:prstGeom>
           <a:solidFill>
             <a:srgbClr val="F7F4EF"/>
           </a:solidFill>
-          <a:ln w="12700">
+          <a:ln w="15240">
             <a:solidFill>
-              <a:srgbClr val="E3DCD1"/>
+              <a:srgbClr val="55565A"/>
             </a:solidFill>
             <a:prstDash val="solid"/>
           </a:ln>
@@ -25335,65 +26301,46 @@
       </p:sp>
       <p:sp>
         <p:nvSpPr>
-          <p:cNvPr id="73" name="Text 71"/>
-          <p:cNvSpPr/>
-          <p:nvPr/>
-        </p:nvSpPr>
-        <p:spPr>
-          <a:xfrm>
-            <a:off x="9579254" y="5010912"/>
-            <a:ext cx="1942186" cy="274320"/>
-          </a:xfrm>
-          <a:prstGeom prst="rect">
-            <a:avLst/>
-          </a:prstGeom>
-          <a:noFill/>
-          <a:ln/>
-        </p:spPr>
-        <p:txBody>
-          <a:bodyPr wrap="square" lIns="0" tIns="0" rIns="0" bIns="0" rtlCol="0" anchor="ctr"/>
-          <a:lstStyle/>
-          <a:p>
-            <a:pPr algn="ctr" indent="0" marL="0">
-              <a:buNone/>
-            </a:pPr>
-            <a:r>
-              <a:rPr lang="en-US" sz="1500" b="1" dirty="0">
-                <a:solidFill>
-                  <a:srgbClr val="F5831F"/>
-                </a:solidFill>
-                <a:latin typeface="DIN Next Arabic" pitchFamily="34" charset="0"/>
-                <a:ea typeface="DIN Next Arabic" pitchFamily="34" charset="-122"/>
-                <a:cs typeface="DIN Next Arabic" pitchFamily="34" charset="-120"/>
-              </a:rPr>
-              <a:t>٤٠٪</a:t>
-            </a:r>
-            <a:endParaRPr lang="en-US" sz="1500" dirty="0"/>
-          </a:p>
-        </p:txBody>
-      </p:sp>
-      <p:sp>
-        <p:nvSpPr>
-          <p:cNvPr id="74" name="Text 72"/>
-          <p:cNvSpPr/>
-          <p:nvPr/>
-        </p:nvSpPr>
-        <p:spPr>
-          <a:xfrm>
-            <a:off x="9579254" y="5303520"/>
-            <a:ext cx="1942186" cy="274320"/>
-          </a:xfrm>
-          <a:prstGeom prst="rect">
-            <a:avLst/>
-          </a:prstGeom>
-          <a:noFill/>
-          <a:ln/>
-        </p:spPr>
-        <p:txBody>
-          <a:bodyPr wrap="square" lIns="0" tIns="0" rIns="0" bIns="0" rtlCol="0" anchor="ctr"/>
-          <a:lstStyle/>
-          <a:p>
-            <a:pPr algn="ctr" indent="0" marL="0">
+          <p:cNvPr id="99" name="Shape 97"/>
+          <p:cNvSpPr/>
+          <p:nvPr/>
+        </p:nvSpPr>
+        <p:spPr>
+          <a:xfrm>
+            <a:off x="8040624" y="5541264"/>
+            <a:ext cx="3553968" cy="45720"/>
+          </a:xfrm>
+          <a:prstGeom prst="rect">
+            <a:avLst/>
+          </a:prstGeom>
+          <a:solidFill>
+            <a:srgbClr val="55565A"/>
+          </a:solidFill>
+          <a:ln/>
+        </p:spPr>
+      </p:sp>
+      <p:sp>
+        <p:nvSpPr>
+          <p:cNvPr id="100" name="Text 98"/>
+          <p:cNvSpPr/>
+          <p:nvPr/>
+        </p:nvSpPr>
+        <p:spPr>
+          <a:xfrm>
+            <a:off x="8973312" y="5614416"/>
+            <a:ext cx="2529840" cy="256032"/>
+          </a:xfrm>
+          <a:prstGeom prst="rect">
+            <a:avLst/>
+          </a:prstGeom>
+          <a:noFill/>
+          <a:ln/>
+        </p:spPr>
+        <p:txBody>
+          <a:bodyPr wrap="square" rtlCol="0" anchor="ctr"/>
+          <a:lstStyle/>
+          <a:p>
+            <a:pPr rtl="1" algn="r" indent="0" marL="0">
               <a:buNone/>
             </a:pPr>
             <a:r>
@@ -25405,7 +26352,7 @@
                 <a:ea typeface="DIN Next Arabic" pitchFamily="34" charset="-122"/>
                 <a:cs typeface="DIN Next Arabic" pitchFamily="34" charset="-120"/>
               </a:rPr>
-              <a:t>زيارات الوردية</a:t>
+              <a:t>الطبقة ١ · عبء الوردية</a:t>
             </a:r>
             <a:endParaRPr lang="en-US" sz="1150" dirty="0"/>
           </a:p>
@@ -25413,65 +26360,126 @@
       </p:sp>
       <p:sp>
         <p:nvSpPr>
-          <p:cNvPr id="75" name="Text 73"/>
-          <p:cNvSpPr/>
-          <p:nvPr/>
-        </p:nvSpPr>
-        <p:spPr>
-          <a:xfrm>
-            <a:off x="9579254" y="5586984"/>
-            <a:ext cx="1942186" cy="274320"/>
-          </a:xfrm>
-          <a:prstGeom prst="rect">
-            <a:avLst/>
-          </a:prstGeom>
-          <a:noFill/>
-          <a:ln/>
-        </p:spPr>
-        <p:txBody>
-          <a:bodyPr wrap="square" lIns="0" tIns="0" rIns="0" bIns="0" rtlCol="0" anchor="ctr"/>
-          <a:lstStyle/>
-          <a:p>
-            <a:pPr algn="ctr" indent="0" marL="0">
-              <a:buNone/>
-            </a:pPr>
-            <a:r>
-              <a:rPr lang="en-US" sz="950" dirty="0">
-                <a:solidFill>
-                  <a:srgbClr val="6E6A64"/>
-                </a:solidFill>
-                <a:latin typeface="DIN Next Arabic" pitchFamily="34" charset="0"/>
-                <a:ea typeface="DIN Next Arabic" pitchFamily="34" charset="-122"/>
-                <a:cs typeface="DIN Next Arabic" pitchFamily="34" charset="-120"/>
-              </a:rPr>
-              <a:t>من منحنى الطلب</a:t>
-            </a:r>
-            <a:endParaRPr lang="en-US" sz="950" dirty="0"/>
-          </a:p>
-        </p:txBody>
-      </p:sp>
-      <p:sp>
-        <p:nvSpPr>
-          <p:cNvPr id="76" name="Shape 74"/>
-          <p:cNvSpPr/>
-          <p:nvPr/>
-        </p:nvSpPr>
-        <p:spPr>
-          <a:xfrm>
-            <a:off x="7271309" y="4956048"/>
-            <a:ext cx="2088490" cy="960120"/>
+          <p:cNvPr id="101" name="Shape 99"/>
+          <p:cNvSpPr/>
+          <p:nvPr/>
+        </p:nvSpPr>
+        <p:spPr>
+          <a:xfrm>
+            <a:off x="8132064" y="5623560"/>
+            <a:ext cx="713232" cy="228600"/>
           </a:xfrm>
           <a:prstGeom prst="roundRect">
             <a:avLst>
-              <a:gd name="adj" fmla="val 3810"/>
+              <a:gd name="adj" fmla="val 12000"/>
+            </a:avLst>
+          </a:prstGeom>
+          <a:solidFill>
+            <a:srgbClr val="55565A"/>
+          </a:solidFill>
+          <a:ln/>
+        </p:spPr>
+      </p:sp>
+      <p:sp>
+        <p:nvSpPr>
+          <p:cNvPr id="102" name="Text 100"/>
+          <p:cNvSpPr/>
+          <p:nvPr/>
+        </p:nvSpPr>
+        <p:spPr>
+          <a:xfrm>
+            <a:off x="8132064" y="5623560"/>
+            <a:ext cx="713232" cy="228600"/>
+          </a:xfrm>
+          <a:prstGeom prst="rect">
+            <a:avLst/>
+          </a:prstGeom>
+          <a:noFill/>
+          <a:ln/>
+        </p:spPr>
+        <p:txBody>
+          <a:bodyPr wrap="square" lIns="0" tIns="0" rIns="0" bIns="0" rtlCol="0" anchor="ctr"/>
+          <a:lstStyle/>
+          <a:p>
+            <a:pPr algn="ctr" indent="0" marL="0">
+              <a:buNone/>
+            </a:pPr>
+            <a:r>
+              <a:rPr lang="en-US" sz="950" b="1" dirty="0">
+                <a:solidFill>
+                  <a:srgbClr val="FFFFFF"/>
+                </a:solidFill>
+                <a:latin typeface="DIN Next Arabic" pitchFamily="34" charset="0"/>
+                <a:ea typeface="DIN Next Arabic" pitchFamily="34" charset="-122"/>
+                <a:cs typeface="DIN Next Arabic" pitchFamily="34" charset="-120"/>
+              </a:rPr>
+              <a:t>معاملة</a:t>
+            </a:r>
+            <a:endParaRPr lang="en-US" sz="950" dirty="0"/>
+          </a:p>
+        </p:txBody>
+      </p:sp>
+      <p:sp>
+        <p:nvSpPr>
+          <p:cNvPr id="103" name="Text 101"/>
+          <p:cNvSpPr/>
+          <p:nvPr/>
+        </p:nvSpPr>
+        <p:spPr>
+          <a:xfrm>
+            <a:off x="8132064" y="5870448"/>
+            <a:ext cx="3371088" cy="457200"/>
+          </a:xfrm>
+          <a:prstGeom prst="rect">
+            <a:avLst/>
+          </a:prstGeom>
+          <a:noFill/>
+          <a:ln/>
+        </p:spPr>
+        <p:txBody>
+          <a:bodyPr wrap="square" rtlCol="0" anchor="ctr"/>
+          <a:lstStyle/>
+          <a:p>
+            <a:pPr rtl="1" algn="r" indent="0" marL="0">
+              <a:buNone/>
+            </a:pPr>
+            <a:r>
+              <a:rPr lang="en-US" sz="1000" dirty="0">
+                <a:solidFill>
+                  <a:srgbClr val="3D3D3D"/>
+                </a:solidFill>
+                <a:latin typeface="DIN Next Arabic" pitchFamily="34" charset="0"/>
+                <a:ea typeface="DIN Next Arabic" pitchFamily="34" charset="-122"/>
+                <a:cs typeface="DIN Next Arabic" pitchFamily="34" charset="-120"/>
+              </a:rPr>
+              <a:t>معاملات الوردية ÷ عمالها. حِمل لا مستهدف: العامل لا يصنع المعاملة.</a:t>
+            </a:r>
+            <a:endParaRPr lang="en-US" sz="1000" dirty="0"/>
+          </a:p>
+        </p:txBody>
+      </p:sp>
+      <p:sp>
+        <p:nvSpPr>
+          <p:cNvPr id="104" name="Shape 102"/>
+          <p:cNvSpPr/>
+          <p:nvPr/>
+        </p:nvSpPr>
+        <p:spPr>
+          <a:xfrm>
+            <a:off x="4303776" y="5541264"/>
+            <a:ext cx="3553968" cy="804672"/>
+          </a:xfrm>
+          <a:prstGeom prst="roundRect">
+            <a:avLst>
+              <a:gd name="adj" fmla="val 5682"/>
             </a:avLst>
           </a:prstGeom>
           <a:solidFill>
             <a:srgbClr val="F7F4EF"/>
           </a:solidFill>
-          <a:ln w="12700">
+          <a:ln w="15240">
             <a:solidFill>
-              <a:srgbClr val="E3DCD1"/>
+              <a:srgbClr val="F5831F"/>
             </a:solidFill>
             <a:prstDash val="solid"/>
           </a:ln>
@@ -25479,65 +26487,46 @@
       </p:sp>
       <p:sp>
         <p:nvSpPr>
-          <p:cNvPr id="77" name="Text 75"/>
-          <p:cNvSpPr/>
-          <p:nvPr/>
-        </p:nvSpPr>
-        <p:spPr>
-          <a:xfrm>
-            <a:off x="7344461" y="5010912"/>
-            <a:ext cx="1942186" cy="274320"/>
-          </a:xfrm>
-          <a:prstGeom prst="rect">
-            <a:avLst/>
-          </a:prstGeom>
-          <a:noFill/>
-          <a:ln/>
-        </p:spPr>
-        <p:txBody>
-          <a:bodyPr wrap="square" lIns="0" tIns="0" rIns="0" bIns="0" rtlCol="0" anchor="ctr"/>
-          <a:lstStyle/>
-          <a:p>
-            <a:pPr algn="ctr" indent="0" marL="0">
-              <a:buNone/>
-            </a:pPr>
-            <a:r>
-              <a:rPr lang="en-US" sz="1500" b="1" dirty="0">
-                <a:solidFill>
-                  <a:srgbClr val="F5831F"/>
-                </a:solidFill>
-                <a:latin typeface="DIN Next Arabic" pitchFamily="34" charset="0"/>
-                <a:ea typeface="DIN Next Arabic" pitchFamily="34" charset="-122"/>
-                <a:cs typeface="DIN Next Arabic" pitchFamily="34" charset="-120"/>
-              </a:rPr>
-              <a:t>٣٠٪</a:t>
-            </a:r>
-            <a:endParaRPr lang="en-US" sz="1500" dirty="0"/>
-          </a:p>
-        </p:txBody>
-      </p:sp>
-      <p:sp>
-        <p:nvSpPr>
-          <p:cNvPr id="78" name="Text 76"/>
-          <p:cNvSpPr/>
-          <p:nvPr/>
-        </p:nvSpPr>
-        <p:spPr>
-          <a:xfrm>
-            <a:off x="7344461" y="5303520"/>
-            <a:ext cx="1942186" cy="274320"/>
-          </a:xfrm>
-          <a:prstGeom prst="rect">
-            <a:avLst/>
-          </a:prstGeom>
-          <a:noFill/>
-          <a:ln/>
-        </p:spPr>
-        <p:txBody>
-          <a:bodyPr wrap="square" lIns="0" tIns="0" rIns="0" bIns="0" rtlCol="0" anchor="ctr"/>
-          <a:lstStyle/>
-          <a:p>
-            <a:pPr algn="ctr" indent="0" marL="0">
+          <p:cNvPr id="105" name="Shape 103"/>
+          <p:cNvSpPr/>
+          <p:nvPr/>
+        </p:nvSpPr>
+        <p:spPr>
+          <a:xfrm>
+            <a:off x="4303776" y="5541264"/>
+            <a:ext cx="3553968" cy="45720"/>
+          </a:xfrm>
+          <a:prstGeom prst="rect">
+            <a:avLst/>
+          </a:prstGeom>
+          <a:solidFill>
+            <a:srgbClr val="F5831F"/>
+          </a:solidFill>
+          <a:ln/>
+        </p:spPr>
+      </p:sp>
+      <p:sp>
+        <p:nvSpPr>
+          <p:cNvPr id="106" name="Text 104"/>
+          <p:cNvSpPr/>
+          <p:nvPr/>
+        </p:nvSpPr>
+        <p:spPr>
+          <a:xfrm>
+            <a:off x="5236464" y="5614416"/>
+            <a:ext cx="2529840" cy="256032"/>
+          </a:xfrm>
+          <a:prstGeom prst="rect">
+            <a:avLst/>
+          </a:prstGeom>
+          <a:noFill/>
+          <a:ln/>
+        </p:spPr>
+        <p:txBody>
+          <a:bodyPr wrap="square" rtlCol="0" anchor="ctr"/>
+          <a:lstStyle/>
+          <a:p>
+            <a:pPr rtl="1" algn="r" indent="0" marL="0">
               <a:buNone/>
             </a:pPr>
             <a:r>
@@ -25549,7 +26538,7 @@
                 <a:ea typeface="DIN Next Arabic" pitchFamily="34" charset="-122"/>
                 <a:cs typeface="DIN Next Arabic" pitchFamily="34" charset="-120"/>
               </a:rPr>
-              <a:t>اللتر لكل زيارة</a:t>
+              <a:t>الطبقة ٢ · مستهدف الوردية</a:t>
             </a:r>
             <a:endParaRPr lang="en-US" sz="1150" dirty="0"/>
           </a:p>
@@ -25557,65 +26546,126 @@
       </p:sp>
       <p:sp>
         <p:nvSpPr>
-          <p:cNvPr id="79" name="Text 77"/>
-          <p:cNvSpPr/>
-          <p:nvPr/>
-        </p:nvSpPr>
-        <p:spPr>
-          <a:xfrm>
-            <a:off x="7344461" y="5586984"/>
-            <a:ext cx="1942186" cy="274320"/>
-          </a:xfrm>
-          <a:prstGeom prst="rect">
-            <a:avLst/>
-          </a:prstGeom>
-          <a:noFill/>
-          <a:ln/>
-        </p:spPr>
-        <p:txBody>
-          <a:bodyPr wrap="square" lIns="0" tIns="0" rIns="0" bIns="0" rtlCol="0" anchor="ctr"/>
-          <a:lstStyle/>
-          <a:p>
-            <a:pPr algn="ctr" indent="0" marL="0">
-              <a:buNone/>
-            </a:pPr>
-            <a:r>
-              <a:rPr lang="en-US" sz="950" dirty="0">
-                <a:solidFill>
-                  <a:srgbClr val="6E6A64"/>
-                </a:solidFill>
-                <a:latin typeface="DIN Next Arabic" pitchFamily="34" charset="0"/>
-                <a:ea typeface="DIN Next Arabic" pitchFamily="34" charset="-122"/>
-                <a:cs typeface="DIN Next Arabic" pitchFamily="34" charset="-120"/>
-              </a:rPr>
-              <a:t>معيار الشريحة</a:t>
-            </a:r>
-            <a:endParaRPr lang="en-US" sz="950" dirty="0"/>
-          </a:p>
-        </p:txBody>
-      </p:sp>
-      <p:sp>
-        <p:nvSpPr>
-          <p:cNvPr id="80" name="Shape 78"/>
-          <p:cNvSpPr/>
-          <p:nvPr/>
-        </p:nvSpPr>
-        <p:spPr>
-          <a:xfrm>
-            <a:off x="5036515" y="4956048"/>
-            <a:ext cx="2088490" cy="960120"/>
+          <p:cNvPr id="107" name="Shape 105"/>
+          <p:cNvSpPr/>
+          <p:nvPr/>
+        </p:nvSpPr>
+        <p:spPr>
+          <a:xfrm>
+            <a:off x="4395216" y="5623560"/>
+            <a:ext cx="713232" cy="228600"/>
           </a:xfrm>
           <a:prstGeom prst="roundRect">
             <a:avLst>
-              <a:gd name="adj" fmla="val 3810"/>
+              <a:gd name="adj" fmla="val 12000"/>
             </a:avLst>
           </a:prstGeom>
           <a:solidFill>
-            <a:srgbClr val="F2DAD4"/>
+            <a:srgbClr val="F5831F"/>
           </a:solidFill>
-          <a:ln w="12700">
+          <a:ln/>
+        </p:spPr>
+      </p:sp>
+      <p:sp>
+        <p:nvSpPr>
+          <p:cNvPr id="108" name="Text 106"/>
+          <p:cNvSpPr/>
+          <p:nvPr/>
+        </p:nvSpPr>
+        <p:spPr>
+          <a:xfrm>
+            <a:off x="4395216" y="5623560"/>
+            <a:ext cx="713232" cy="228600"/>
+          </a:xfrm>
+          <a:prstGeom prst="rect">
+            <a:avLst/>
+          </a:prstGeom>
+          <a:noFill/>
+          <a:ln/>
+        </p:spPr>
+        <p:txBody>
+          <a:bodyPr wrap="square" lIns="0" tIns="0" rIns="0" bIns="0" rtlCol="0" anchor="ctr"/>
+          <a:lstStyle/>
+          <a:p>
+            <a:pPr algn="ctr" indent="0" marL="0">
+              <a:buNone/>
+            </a:pPr>
+            <a:r>
+              <a:rPr lang="en-US" sz="950" b="1" dirty="0">
+                <a:solidFill>
+                  <a:srgbClr val="FFFFFF"/>
+                </a:solidFill>
+                <a:latin typeface="DIN Next Arabic" pitchFamily="34" charset="0"/>
+                <a:ea typeface="DIN Next Arabic" pitchFamily="34" charset="-122"/>
+                <a:cs typeface="DIN Next Arabic" pitchFamily="34" charset="-120"/>
+              </a:rPr>
+              <a:t>معاملة</a:t>
+            </a:r>
+            <a:endParaRPr lang="en-US" sz="950" dirty="0"/>
+          </a:p>
+        </p:txBody>
+      </p:sp>
+      <p:sp>
+        <p:nvSpPr>
+          <p:cNvPr id="109" name="Text 107"/>
+          <p:cNvSpPr/>
+          <p:nvPr/>
+        </p:nvSpPr>
+        <p:spPr>
+          <a:xfrm>
+            <a:off x="4395216" y="5870448"/>
+            <a:ext cx="3371088" cy="457200"/>
+          </a:xfrm>
+          <a:prstGeom prst="rect">
+            <a:avLst/>
+          </a:prstGeom>
+          <a:noFill/>
+          <a:ln/>
+        </p:spPr>
+        <p:txBody>
+          <a:bodyPr wrap="square" rtlCol="0" anchor="ctr"/>
+          <a:lstStyle/>
+          <a:p>
+            <a:pPr rtl="1" algn="r" indent="0" marL="0">
+              <a:buNone/>
+            </a:pPr>
+            <a:r>
+              <a:rPr lang="en-US" sz="1000" dirty="0">
+                <a:solidFill>
+                  <a:srgbClr val="3D3D3D"/>
+                </a:solidFill>
+                <a:latin typeface="DIN Next Arabic" pitchFamily="34" charset="0"/>
+                <a:ea typeface="DIN Next Arabic" pitchFamily="34" charset="-122"/>
+                <a:cs typeface="DIN Next Arabic" pitchFamily="34" charset="-120"/>
+              </a:rPr>
+              <a:t>ما تفقده المحطة في ساعات ذروتها مقارنة بشريحتها. هذا وحده ما يُطالَب به.</a:t>
+            </a:r>
+            <a:endParaRPr lang="en-US" sz="1000" dirty="0"/>
+          </a:p>
+        </p:txBody>
+      </p:sp>
+      <p:sp>
+        <p:nvSpPr>
+          <p:cNvPr id="110" name="Shape 108"/>
+          <p:cNvSpPr/>
+          <p:nvPr/>
+        </p:nvSpPr>
+        <p:spPr>
+          <a:xfrm>
+            <a:off x="566928" y="5541264"/>
+            <a:ext cx="3553968" cy="804672"/>
+          </a:xfrm>
+          <a:prstGeom prst="roundRect">
+            <a:avLst>
+              <a:gd name="adj" fmla="val 5682"/>
+            </a:avLst>
+          </a:prstGeom>
+          <a:solidFill>
+            <a:srgbClr val="F7F4EF"/>
+          </a:solidFill>
+          <a:ln w="15240">
             <a:solidFill>
-              <a:srgbClr val="C0503A"/>
+              <a:srgbClr val="2E8B6F"/>
             </a:solidFill>
             <a:prstDash val="solid"/>
           </a:ln>
@@ -25623,65 +26673,46 @@
       </p:sp>
       <p:sp>
         <p:nvSpPr>
-          <p:cNvPr id="81" name="Text 79"/>
-          <p:cNvSpPr/>
-          <p:nvPr/>
-        </p:nvSpPr>
-        <p:spPr>
-          <a:xfrm>
-            <a:off x="5109667" y="5010912"/>
-            <a:ext cx="1942186" cy="274320"/>
-          </a:xfrm>
-          <a:prstGeom prst="rect">
-            <a:avLst/>
-          </a:prstGeom>
-          <a:noFill/>
-          <a:ln/>
-        </p:spPr>
-        <p:txBody>
-          <a:bodyPr wrap="square" lIns="0" tIns="0" rIns="0" bIns="0" rtlCol="0" anchor="ctr"/>
-          <a:lstStyle/>
-          <a:p>
-            <a:pPr algn="ctr" indent="0" marL="0">
-              <a:buNone/>
-            </a:pPr>
-            <a:r>
-              <a:rPr lang="en-US" sz="1500" b="1" dirty="0">
-                <a:solidFill>
-                  <a:srgbClr val="9A3E2C"/>
-                </a:solidFill>
-                <a:latin typeface="DIN Next Arabic" pitchFamily="34" charset="0"/>
-                <a:ea typeface="DIN Next Arabic" pitchFamily="34" charset="-122"/>
-                <a:cs typeface="DIN Next Arabic" pitchFamily="34" charset="-120"/>
-              </a:rPr>
-              <a:t>بوابة</a:t>
-            </a:r>
-            <a:endParaRPr lang="en-US" sz="1500" dirty="0"/>
-          </a:p>
-        </p:txBody>
-      </p:sp>
-      <p:sp>
-        <p:nvSpPr>
-          <p:cNvPr id="82" name="Text 80"/>
-          <p:cNvSpPr/>
-          <p:nvPr/>
-        </p:nvSpPr>
-        <p:spPr>
-          <a:xfrm>
-            <a:off x="5109667" y="5303520"/>
-            <a:ext cx="1942186" cy="274320"/>
-          </a:xfrm>
-          <a:prstGeom prst="rect">
-            <a:avLst/>
-          </a:prstGeom>
-          <a:noFill/>
-          <a:ln/>
-        </p:spPr>
-        <p:txBody>
-          <a:bodyPr wrap="square" lIns="0" tIns="0" rIns="0" bIns="0" rtlCol="0" anchor="ctr"/>
-          <a:lstStyle/>
-          <a:p>
-            <a:pPr algn="ctr" indent="0" marL="0">
+          <p:cNvPr id="111" name="Shape 109"/>
+          <p:cNvSpPr/>
+          <p:nvPr/>
+        </p:nvSpPr>
+        <p:spPr>
+          <a:xfrm>
+            <a:off x="566928" y="5541264"/>
+            <a:ext cx="3553968" cy="45720"/>
+          </a:xfrm>
+          <a:prstGeom prst="rect">
+            <a:avLst/>
+          </a:prstGeom>
+          <a:solidFill>
+            <a:srgbClr val="2E8B6F"/>
+          </a:solidFill>
+          <a:ln/>
+        </p:spPr>
+      </p:sp>
+      <p:sp>
+        <p:nvSpPr>
+          <p:cNvPr id="112" name="Text 110"/>
+          <p:cNvSpPr/>
+          <p:nvPr/>
+        </p:nvSpPr>
+        <p:spPr>
+          <a:xfrm>
+            <a:off x="1499616" y="5614416"/>
+            <a:ext cx="2529840" cy="256032"/>
+          </a:xfrm>
+          <a:prstGeom prst="rect">
+            <a:avLst/>
+          </a:prstGeom>
+          <a:noFill/>
+          <a:ln/>
+        </p:spPr>
+        <p:txBody>
+          <a:bodyPr wrap="square" rtlCol="0" anchor="ctr"/>
+          <a:lstStyle/>
+          <a:p>
+            <a:pPr rtl="1" algn="r" indent="0" marL="0">
               <a:buNone/>
             </a:pPr>
             <a:r>
@@ -25693,7 +26724,7 @@
                 <a:ea typeface="DIN Next Arabic" pitchFamily="34" charset="-122"/>
                 <a:cs typeface="DIN Next Arabic" pitchFamily="34" charset="-120"/>
               </a:rPr>
-              <a:t>جودة الخدمة</a:t>
+              <a:t>الطبقة ٣ · الحافز</a:t>
             </a:r>
             <a:endParaRPr lang="en-US" sz="1150" dirty="0"/>
           </a:p>
@@ -25701,80 +26732,36 @@
       </p:sp>
       <p:sp>
         <p:nvSpPr>
-          <p:cNvPr id="83" name="Text 81"/>
-          <p:cNvSpPr/>
-          <p:nvPr/>
-        </p:nvSpPr>
-        <p:spPr>
-          <a:xfrm>
-            <a:off x="5109667" y="5586984"/>
-            <a:ext cx="1942186" cy="274320"/>
-          </a:xfrm>
-          <a:prstGeom prst="rect">
-            <a:avLst/>
-          </a:prstGeom>
-          <a:noFill/>
-          <a:ln/>
-        </p:spPr>
-        <p:txBody>
-          <a:bodyPr wrap="square" lIns="0" tIns="0" rIns="0" bIns="0" rtlCol="0" anchor="ctr"/>
-          <a:lstStyle/>
-          <a:p>
-            <a:pPr algn="ctr" indent="0" marL="0">
-              <a:buNone/>
-            </a:pPr>
-            <a:r>
-              <a:rPr lang="en-US" sz="950" dirty="0">
-                <a:solidFill>
-                  <a:srgbClr val="6E6A64"/>
-                </a:solidFill>
-                <a:latin typeface="DIN Next Arabic" pitchFamily="34" charset="0"/>
-                <a:ea typeface="DIN Next Arabic" pitchFamily="34" charset="-122"/>
-                <a:cs typeface="DIN Next Arabic" pitchFamily="34" charset="-120"/>
-              </a:rPr>
-              <a:t>بوابة — لا حافز دونها</a:t>
-            </a:r>
-            <a:endParaRPr lang="en-US" sz="950" dirty="0"/>
-          </a:p>
-        </p:txBody>
-      </p:sp>
-      <p:sp>
-        <p:nvSpPr>
-          <p:cNvPr id="84" name="Shape 82"/>
-          <p:cNvSpPr/>
-          <p:nvPr/>
-        </p:nvSpPr>
-        <p:spPr>
-          <a:xfrm>
-            <a:off x="2801722" y="4956048"/>
-            <a:ext cx="2088490" cy="960120"/>
+          <p:cNvPr id="113" name="Shape 111"/>
+          <p:cNvSpPr/>
+          <p:nvPr/>
+        </p:nvSpPr>
+        <p:spPr>
+          <a:xfrm>
+            <a:off x="658368" y="5623560"/>
+            <a:ext cx="713232" cy="228600"/>
           </a:xfrm>
           <a:prstGeom prst="roundRect">
             <a:avLst>
-              <a:gd name="adj" fmla="val 3810"/>
+              <a:gd name="adj" fmla="val 12000"/>
             </a:avLst>
           </a:prstGeom>
           <a:solidFill>
-            <a:srgbClr val="F7F4EF"/>
+            <a:srgbClr val="2E8B6F"/>
           </a:solidFill>
-          <a:ln w="12700">
-            <a:solidFill>
-              <a:srgbClr val="E3DCD1"/>
-            </a:solidFill>
-            <a:prstDash val="solid"/>
-          </a:ln>
-        </p:spPr>
-      </p:sp>
-      <p:sp>
-        <p:nvSpPr>
-          <p:cNvPr id="85" name="Text 83"/>
-          <p:cNvSpPr/>
-          <p:nvPr/>
-        </p:nvSpPr>
-        <p:spPr>
-          <a:xfrm>
-            <a:off x="2874874" y="5010912"/>
-            <a:ext cx="1942186" cy="274320"/>
+          <a:ln/>
+        </p:spPr>
+      </p:sp>
+      <p:sp>
+        <p:nvSpPr>
+          <p:cNvPr id="114" name="Text 112"/>
+          <p:cNvSpPr/>
+          <p:nvPr/>
+        </p:nvSpPr>
+        <p:spPr>
+          <a:xfrm>
+            <a:off x="658368" y="5623560"/>
+            <a:ext cx="713232" cy="228600"/>
           </a:xfrm>
           <a:prstGeom prst="rect">
             <a:avLst/>
@@ -25790,93 +26777,15 @@
               <a:buNone/>
             </a:pPr>
             <a:r>
-              <a:rPr lang="en-US" sz="1500" b="1" dirty="0">
-                <a:solidFill>
-                  <a:srgbClr val="F5831F"/>
-                </a:solidFill>
-                <a:latin typeface="DIN Next Arabic" pitchFamily="34" charset="0"/>
-                <a:ea typeface="DIN Next Arabic" pitchFamily="34" charset="-122"/>
-                <a:cs typeface="DIN Next Arabic" pitchFamily="34" charset="-120"/>
-              </a:rPr>
-              <a:t>١٥٪</a:t>
-            </a:r>
-            <a:endParaRPr lang="en-US" sz="1500" dirty="0"/>
-          </a:p>
-        </p:txBody>
-      </p:sp>
-      <p:sp>
-        <p:nvSpPr>
-          <p:cNvPr id="86" name="Text 84"/>
-          <p:cNvSpPr/>
-          <p:nvPr/>
-        </p:nvSpPr>
-        <p:spPr>
-          <a:xfrm>
-            <a:off x="2874874" y="5303520"/>
-            <a:ext cx="1942186" cy="274320"/>
-          </a:xfrm>
-          <a:prstGeom prst="rect">
-            <a:avLst/>
-          </a:prstGeom>
-          <a:noFill/>
-          <a:ln/>
-        </p:spPr>
-        <p:txBody>
-          <a:bodyPr wrap="square" lIns="0" tIns="0" rIns="0" bIns="0" rtlCol="0" anchor="ctr"/>
-          <a:lstStyle/>
-          <a:p>
-            <a:pPr algn="ctr" indent="0" marL="0">
-              <a:buNone/>
-            </a:pPr>
-            <a:r>
-              <a:rPr lang="en-US" sz="1150" b="1" dirty="0">
-                <a:solidFill>
-                  <a:srgbClr val="55565A"/>
-                </a:solidFill>
-                <a:latin typeface="DIN Next Arabic" pitchFamily="34" charset="0"/>
-                <a:ea typeface="DIN Next Arabic" pitchFamily="34" charset="-122"/>
-                <a:cs typeface="DIN Next Arabic" pitchFamily="34" charset="-120"/>
-              </a:rPr>
-              <a:t>تسجيل وسيلة الدفع</a:t>
-            </a:r>
-            <a:endParaRPr lang="en-US" sz="1150" dirty="0"/>
-          </a:p>
-        </p:txBody>
-      </p:sp>
-      <p:sp>
-        <p:nvSpPr>
-          <p:cNvPr id="87" name="Text 85"/>
-          <p:cNvSpPr/>
-          <p:nvPr/>
-        </p:nvSpPr>
-        <p:spPr>
-          <a:xfrm>
-            <a:off x="2874874" y="5586984"/>
-            <a:ext cx="1942186" cy="274320"/>
-          </a:xfrm>
-          <a:prstGeom prst="rect">
-            <a:avLst/>
-          </a:prstGeom>
-          <a:noFill/>
-          <a:ln/>
-        </p:spPr>
-        <p:txBody>
-          <a:bodyPr wrap="square" lIns="0" tIns="0" rIns="0" bIns="0" rtlCol="0" anchor="ctr"/>
-          <a:lstStyle/>
-          <a:p>
-            <a:pPr algn="ctr" indent="0" marL="0">
-              <a:buNone/>
-            </a:pPr>
-            <a:r>
-              <a:rPr lang="en-US" sz="950" dirty="0">
-                <a:solidFill>
-                  <a:srgbClr val="6E6A64"/>
-                </a:solidFill>
-                <a:latin typeface="DIN Next Arabic" pitchFamily="34" charset="0"/>
-                <a:ea typeface="DIN Next Arabic" pitchFamily="34" charset="-122"/>
-                <a:cs typeface="DIN Next Arabic" pitchFamily="34" charset="-120"/>
-              </a:rPr>
-              <a:t>يقفل ثغرة الـ٣٦٪</a:t>
+              <a:rPr lang="en-US" sz="950" b="1" dirty="0">
+                <a:solidFill>
+                  <a:srgbClr val="FFFFFF"/>
+                </a:solidFill>
+                <a:latin typeface="DIN Next Arabic" pitchFamily="34" charset="0"/>
+                <a:ea typeface="DIN Next Arabic" pitchFamily="34" charset="-122"/>
+                <a:cs typeface="DIN Next Arabic" pitchFamily="34" charset="-120"/>
+              </a:rPr>
+              <a:t>ريال</a:t>
             </a:r>
             <a:endParaRPr lang="en-US" sz="950" dirty="0"/>
           </a:p>
@@ -25884,178 +26793,14 @@
       </p:sp>
       <p:sp>
         <p:nvSpPr>
-          <p:cNvPr id="88" name="Shape 86"/>
-          <p:cNvSpPr/>
-          <p:nvPr/>
-        </p:nvSpPr>
-        <p:spPr>
-          <a:xfrm>
-            <a:off x="566928" y="4956048"/>
-            <a:ext cx="2088490" cy="960120"/>
-          </a:xfrm>
-          <a:prstGeom prst="roundRect">
-            <a:avLst>
-              <a:gd name="adj" fmla="val 3810"/>
-            </a:avLst>
-          </a:prstGeom>
-          <a:solidFill>
-            <a:srgbClr val="F7F4EF"/>
-          </a:solidFill>
-          <a:ln w="12700">
-            <a:solidFill>
-              <a:srgbClr val="E3DCD1"/>
-            </a:solidFill>
-            <a:prstDash val="solid"/>
-          </a:ln>
-        </p:spPr>
-      </p:sp>
-      <p:sp>
-        <p:nvSpPr>
-          <p:cNvPr id="89" name="Text 87"/>
-          <p:cNvSpPr/>
-          <p:nvPr/>
-        </p:nvSpPr>
-        <p:spPr>
-          <a:xfrm>
-            <a:off x="640080" y="5010912"/>
-            <a:ext cx="1942186" cy="274320"/>
-          </a:xfrm>
-          <a:prstGeom prst="rect">
-            <a:avLst/>
-          </a:prstGeom>
-          <a:noFill/>
-          <a:ln/>
-        </p:spPr>
-        <p:txBody>
-          <a:bodyPr wrap="square" lIns="0" tIns="0" rIns="0" bIns="0" rtlCol="0" anchor="ctr"/>
-          <a:lstStyle/>
-          <a:p>
-            <a:pPr algn="ctr" indent="0" marL="0">
-              <a:buNone/>
-            </a:pPr>
-            <a:r>
-              <a:rPr lang="en-US" sz="1500" b="1" dirty="0">
-                <a:solidFill>
-                  <a:srgbClr val="F5831F"/>
-                </a:solidFill>
-                <a:latin typeface="DIN Next Arabic" pitchFamily="34" charset="0"/>
-                <a:ea typeface="DIN Next Arabic" pitchFamily="34" charset="-122"/>
-                <a:cs typeface="DIN Next Arabic" pitchFamily="34" charset="-120"/>
-              </a:rPr>
-              <a:t>١٥٪</a:t>
-            </a:r>
-            <a:endParaRPr lang="en-US" sz="1500" dirty="0"/>
-          </a:p>
-        </p:txBody>
-      </p:sp>
-      <p:sp>
-        <p:nvSpPr>
-          <p:cNvPr id="90" name="Text 88"/>
-          <p:cNvSpPr/>
-          <p:nvPr/>
-        </p:nvSpPr>
-        <p:spPr>
-          <a:xfrm>
-            <a:off x="640080" y="5303520"/>
-            <a:ext cx="1942186" cy="274320"/>
-          </a:xfrm>
-          <a:prstGeom prst="rect">
-            <a:avLst/>
-          </a:prstGeom>
-          <a:noFill/>
-          <a:ln/>
-        </p:spPr>
-        <p:txBody>
-          <a:bodyPr wrap="square" lIns="0" tIns="0" rIns="0" bIns="0" rtlCol="0" anchor="ctr"/>
-          <a:lstStyle/>
-          <a:p>
-            <a:pPr algn="ctr" indent="0" marL="0">
-              <a:buNone/>
-            </a:pPr>
-            <a:r>
-              <a:rPr lang="en-US" sz="1150" b="1" dirty="0">
-                <a:solidFill>
-                  <a:srgbClr val="55565A"/>
-                </a:solidFill>
-                <a:latin typeface="DIN Next Arabic" pitchFamily="34" charset="0"/>
-                <a:ea typeface="DIN Next Arabic" pitchFamily="34" charset="-122"/>
-                <a:cs typeface="DIN Next Arabic" pitchFamily="34" charset="-120"/>
-              </a:rPr>
-              <a:t>تحويل الحملة</a:t>
-            </a:r>
-            <a:endParaRPr lang="en-US" sz="1150" dirty="0"/>
-          </a:p>
-        </p:txBody>
-      </p:sp>
-      <p:sp>
-        <p:nvSpPr>
-          <p:cNvPr id="91" name="Text 89"/>
-          <p:cNvSpPr/>
-          <p:nvPr/>
-        </p:nvSpPr>
-        <p:spPr>
-          <a:xfrm>
-            <a:off x="640080" y="5586984"/>
-            <a:ext cx="1942186" cy="274320"/>
-          </a:xfrm>
-          <a:prstGeom prst="rect">
-            <a:avLst/>
-          </a:prstGeom>
-          <a:noFill/>
-          <a:ln/>
-        </p:spPr>
-        <p:txBody>
-          <a:bodyPr wrap="square" lIns="0" tIns="0" rIns="0" bIns="0" rtlCol="0" anchor="ctr"/>
-          <a:lstStyle/>
-          <a:p>
-            <a:pPr algn="ctr" indent="0" marL="0">
-              <a:buNone/>
-            </a:pPr>
-            <a:r>
-              <a:rPr lang="en-US" sz="950" dirty="0">
-                <a:solidFill>
-                  <a:srgbClr val="6E6A64"/>
-                </a:solidFill>
-                <a:latin typeface="DIN Next Arabic" pitchFamily="34" charset="0"/>
-                <a:ea typeface="DIN Next Arabic" pitchFamily="34" charset="-122"/>
-                <a:cs typeface="DIN Next Arabic" pitchFamily="34" charset="-120"/>
-              </a:rPr>
-              <a:t>هدايا مسلّمة/١٠٠ زيارة</a:t>
-            </a:r>
-            <a:endParaRPr lang="en-US" sz="950" dirty="0"/>
-          </a:p>
-        </p:txBody>
-      </p:sp>
-      <p:sp>
-        <p:nvSpPr>
-          <p:cNvPr id="92" name="Shape 90"/>
-          <p:cNvSpPr/>
-          <p:nvPr/>
-        </p:nvSpPr>
-        <p:spPr>
-          <a:xfrm>
-            <a:off x="566928" y="5989320"/>
-            <a:ext cx="11027664" cy="18288"/>
-          </a:xfrm>
-          <a:prstGeom prst="rect">
-            <a:avLst/>
-          </a:prstGeom>
-          <a:solidFill>
-            <a:srgbClr val="E3DCD1"/>
-          </a:solidFill>
-          <a:ln/>
-        </p:spPr>
-      </p:sp>
-      <p:sp>
-        <p:nvSpPr>
-          <p:cNvPr id="93" name="Text 91"/>
-          <p:cNvSpPr/>
-          <p:nvPr/>
-        </p:nvSpPr>
-        <p:spPr>
-          <a:xfrm>
-            <a:off x="566928" y="6035040"/>
-            <a:ext cx="11027664" cy="329184"/>
+          <p:cNvPr id="115" name="Text 113"/>
+          <p:cNvSpPr/>
+          <p:nvPr/>
+        </p:nvSpPr>
+        <p:spPr>
+          <a:xfrm>
+            <a:off x="658368" y="5870448"/>
+            <a:ext cx="3371088" cy="457200"/>
           </a:xfrm>
           <a:prstGeom prst="rect">
             <a:avLst/>
@@ -26073,13 +26818,13 @@
             <a:r>
               <a:rPr lang="en-US" sz="1000" dirty="0">
                 <a:solidFill>
-                  <a:srgbClr val="9B968E"/>
-                </a:solidFill>
-                <a:latin typeface="DIN Next Arabic" pitchFamily="34" charset="0"/>
-                <a:ea typeface="DIN Next Arabic" pitchFamily="34" charset="-122"/>
-                <a:cs typeface="DIN Next Arabic" pitchFamily="34" charset="-120"/>
-              </a:rPr>
-              <a:t>أعداد العمال متاحة لخمس محطات فقط — تعميم المستهدف على الشبكة يتطلب جدول عمالة لكل محطة ووردية.</a:t>
+                  <a:srgbClr val="3D3D3D"/>
+                </a:solidFill>
+                <a:latin typeface="DIN Next Arabic" pitchFamily="34" charset="0"/>
+                <a:ea typeface="DIN Next Arabic" pitchFamily="34" charset="-122"/>
+                <a:cs typeface="DIN Next Arabic" pitchFamily="34" charset="-120"/>
+              </a:rPr>
+              <a:t>اللترات الإضافية × هامش المحطة × نسبة، ببوابة جودة وسقف ١٠٠ ريال.</a:t>
             </a:r>
             <a:endParaRPr lang="en-US" sz="1000" dirty="0"/>
           </a:p>
